--- a/AIS5103/ML-slide-6.pptx
+++ b/AIS5103/ML-slide-6.pptx
@@ -10,11 +10,11 @@
   <p:sldIdLst>
     <p:sldId id="258" r:id="rId2"/>
     <p:sldId id="329" r:id="rId3"/>
-    <p:sldId id="316" r:id="rId4"/>
-    <p:sldId id="317" r:id="rId5"/>
-    <p:sldId id="318" r:id="rId6"/>
-    <p:sldId id="314" r:id="rId7"/>
-    <p:sldId id="315" r:id="rId8"/>
+    <p:sldId id="315" r:id="rId4"/>
+    <p:sldId id="316" r:id="rId5"/>
+    <p:sldId id="317" r:id="rId6"/>
+    <p:sldId id="318" r:id="rId7"/>
+    <p:sldId id="314" r:id="rId8"/>
     <p:sldId id="319" r:id="rId9"/>
     <p:sldId id="320" r:id="rId10"/>
     <p:sldId id="321" r:id="rId11"/>
@@ -139,6 +139,187 @@
 <file path=ppt/changesInfos/changesInfo1.xml><?xml version="1.0" encoding="utf-8"?>
 <pc:chgInfo xmlns:a="http://schemas.openxmlformats.org/drawingml/2006/main" xmlns:r="http://schemas.openxmlformats.org/officeDocument/2006/relationships" xmlns:ac="http://schemas.microsoft.com/office/drawing/2013/main/command" xmlns:pc="http://schemas.microsoft.com/office/powerpoint/2013/main/command">
   <pc:docChgLst>
+    <pc:chgData name="Wang Jian-Sheng" userId="7d25d710-0931-49a3-acef-49192cec40f2" providerId="ADAL" clId="{06E45FE4-345D-4175-8A06-9288CBB6B74A}"/>
+    <pc:docChg chg="custSel addSld delSld modSld">
+      <pc:chgData name="Wang Jian-Sheng" userId="7d25d710-0931-49a3-acef-49192cec40f2" providerId="ADAL" clId="{06E45FE4-345D-4175-8A06-9288CBB6B74A}" dt="2026-09-28T03:38:05.281" v="334" actId="20577"/>
+      <pc:docMkLst>
+        <pc:docMk/>
+      </pc:docMkLst>
+      <pc:sldChg chg="modSp">
+        <pc:chgData name="Wang Jian-Sheng" userId="7d25d710-0931-49a3-acef-49192cec40f2" providerId="ADAL" clId="{06E45FE4-345D-4175-8A06-9288CBB6B74A}" dt="2026-09-28T03:02:29.051" v="20" actId="20577"/>
+        <pc:sldMkLst>
+          <pc:docMk/>
+          <pc:sldMk cId="1530894939" sldId="314"/>
+        </pc:sldMkLst>
+        <pc:spChg chg="mod">
+          <ac:chgData name="Wang Jian-Sheng" userId="7d25d710-0931-49a3-acef-49192cec40f2" providerId="ADAL" clId="{06E45FE4-345D-4175-8A06-9288CBB6B74A}" dt="2026-09-28T03:02:29.051" v="20" actId="20577"/>
+          <ac:spMkLst>
+            <pc:docMk/>
+            <pc:sldMk cId="1530894939" sldId="314"/>
+            <ac:spMk id="3" creationId="{475794ED-3E24-36F7-0208-95B5F1C4FB77}"/>
+          </ac:spMkLst>
+        </pc:spChg>
+      </pc:sldChg>
+      <pc:sldChg chg="add">
+        <pc:chgData name="Wang Jian-Sheng" userId="7d25d710-0931-49a3-acef-49192cec40f2" providerId="ADAL" clId="{06E45FE4-345D-4175-8A06-9288CBB6B74A}" dt="2026-09-28T03:03:41.342" v="22"/>
+        <pc:sldMkLst>
+          <pc:docMk/>
+          <pc:sldMk cId="576269064" sldId="315"/>
+        </pc:sldMkLst>
+      </pc:sldChg>
+      <pc:sldChg chg="del">
+        <pc:chgData name="Wang Jian-Sheng" userId="7d25d710-0931-49a3-acef-49192cec40f2" providerId="ADAL" clId="{06E45FE4-345D-4175-8A06-9288CBB6B74A}" dt="2026-09-28T03:03:31.978" v="21" actId="2696"/>
+        <pc:sldMkLst>
+          <pc:docMk/>
+          <pc:sldMk cId="881298221" sldId="315"/>
+        </pc:sldMkLst>
+      </pc:sldChg>
+      <pc:sldChg chg="modSp">
+        <pc:chgData name="Wang Jian-Sheng" userId="7d25d710-0931-49a3-acef-49192cec40f2" providerId="ADAL" clId="{06E45FE4-345D-4175-8A06-9288CBB6B74A}" dt="2026-09-28T02:54:31.750" v="1" actId="20577"/>
+        <pc:sldMkLst>
+          <pc:docMk/>
+          <pc:sldMk cId="708994579" sldId="316"/>
+        </pc:sldMkLst>
+        <pc:spChg chg="mod">
+          <ac:chgData name="Wang Jian-Sheng" userId="7d25d710-0931-49a3-acef-49192cec40f2" providerId="ADAL" clId="{06E45FE4-345D-4175-8A06-9288CBB6B74A}" dt="2026-09-28T02:54:31.750" v="1" actId="20577"/>
+          <ac:spMkLst>
+            <pc:docMk/>
+            <pc:sldMk cId="708994579" sldId="316"/>
+            <ac:spMk id="3" creationId="{3AD0DA7D-BE99-57F0-F543-E534995716AF}"/>
+          </ac:spMkLst>
+        </pc:spChg>
+      </pc:sldChg>
+      <pc:sldChg chg="modSp modNotesTx">
+        <pc:chgData name="Wang Jian-Sheng" userId="7d25d710-0931-49a3-acef-49192cec40f2" providerId="ADAL" clId="{06E45FE4-345D-4175-8A06-9288CBB6B74A}" dt="2026-09-28T03:34:52.777" v="255" actId="20577"/>
+        <pc:sldMkLst>
+          <pc:docMk/>
+          <pc:sldMk cId="843409894" sldId="317"/>
+        </pc:sldMkLst>
+        <pc:spChg chg="mod">
+          <ac:chgData name="Wang Jian-Sheng" userId="7d25d710-0931-49a3-acef-49192cec40f2" providerId="ADAL" clId="{06E45FE4-345D-4175-8A06-9288CBB6B74A}" dt="2026-09-28T03:21:17.370" v="60" actId="20577"/>
+          <ac:spMkLst>
+            <pc:docMk/>
+            <pc:sldMk cId="843409894" sldId="317"/>
+            <ac:spMk id="3" creationId="{A35BD1A7-97DB-4793-15A1-B6EDA2CD59DA}"/>
+          </ac:spMkLst>
+        </pc:spChg>
+      </pc:sldChg>
+      <pc:sldChg chg="modSp">
+        <pc:chgData name="Wang Jian-Sheng" userId="7d25d710-0931-49a3-acef-49192cec40f2" providerId="ADAL" clId="{06E45FE4-345D-4175-8A06-9288CBB6B74A}" dt="2026-09-28T03:23:20.561" v="167" actId="20577"/>
+        <pc:sldMkLst>
+          <pc:docMk/>
+          <pc:sldMk cId="1438206099" sldId="319"/>
+        </pc:sldMkLst>
+        <pc:spChg chg="mod">
+          <ac:chgData name="Wang Jian-Sheng" userId="7d25d710-0931-49a3-acef-49192cec40f2" providerId="ADAL" clId="{06E45FE4-345D-4175-8A06-9288CBB6B74A}" dt="2026-09-28T03:23:20.561" v="167" actId="20577"/>
+          <ac:spMkLst>
+            <pc:docMk/>
+            <pc:sldMk cId="1438206099" sldId="319"/>
+            <ac:spMk id="3" creationId="{35A27D74-D1B0-5DAB-3498-D4010636DD2C}"/>
+          </ac:spMkLst>
+        </pc:spChg>
+      </pc:sldChg>
+      <pc:sldChg chg="modSp">
+        <pc:chgData name="Wang Jian-Sheng" userId="7d25d710-0931-49a3-acef-49192cec40f2" providerId="ADAL" clId="{06E45FE4-345D-4175-8A06-9288CBB6B74A}" dt="2026-09-28T03:31:03.302" v="235" actId="20577"/>
+        <pc:sldMkLst>
+          <pc:docMk/>
+          <pc:sldMk cId="1360638213" sldId="320"/>
+        </pc:sldMkLst>
+        <pc:spChg chg="mod">
+          <ac:chgData name="Wang Jian-Sheng" userId="7d25d710-0931-49a3-acef-49192cec40f2" providerId="ADAL" clId="{06E45FE4-345D-4175-8A06-9288CBB6B74A}" dt="2026-09-28T03:31:03.302" v="235" actId="20577"/>
+          <ac:spMkLst>
+            <pc:docMk/>
+            <pc:sldMk cId="1360638213" sldId="320"/>
+            <ac:spMk id="2" creationId="{D3A009D4-0BDC-B4F5-F3FB-FFE7C8334627}"/>
+          </ac:spMkLst>
+        </pc:spChg>
+      </pc:sldChg>
+      <pc:sldChg chg="modSp">
+        <pc:chgData name="Wang Jian-Sheng" userId="7d25d710-0931-49a3-acef-49192cec40f2" providerId="ADAL" clId="{06E45FE4-345D-4175-8A06-9288CBB6B74A}" dt="2026-09-28T03:28:32.261" v="212" actId="20577"/>
+        <pc:sldMkLst>
+          <pc:docMk/>
+          <pc:sldMk cId="3528418070" sldId="325"/>
+        </pc:sldMkLst>
+        <pc:spChg chg="mod">
+          <ac:chgData name="Wang Jian-Sheng" userId="7d25d710-0931-49a3-acef-49192cec40f2" providerId="ADAL" clId="{06E45FE4-345D-4175-8A06-9288CBB6B74A}" dt="2026-09-28T03:28:32.261" v="212" actId="20577"/>
+          <ac:spMkLst>
+            <pc:docMk/>
+            <pc:sldMk cId="3528418070" sldId="325"/>
+            <ac:spMk id="3" creationId="{8294ECFD-245E-62E3-7D79-A39ED4F44C07}"/>
+          </ac:spMkLst>
+        </pc:spChg>
+      </pc:sldChg>
+      <pc:sldChg chg="modSp">
+        <pc:chgData name="Wang Jian-Sheng" userId="7d25d710-0931-49a3-acef-49192cec40f2" providerId="ADAL" clId="{06E45FE4-345D-4175-8A06-9288CBB6B74A}" dt="2026-09-28T03:38:05.281" v="334" actId="20577"/>
+        <pc:sldMkLst>
+          <pc:docMk/>
+          <pc:sldMk cId="2601406605" sldId="327"/>
+        </pc:sldMkLst>
+        <pc:spChg chg="mod">
+          <ac:chgData name="Wang Jian-Sheng" userId="7d25d710-0931-49a3-acef-49192cec40f2" providerId="ADAL" clId="{06E45FE4-345D-4175-8A06-9288CBB6B74A}" dt="2026-09-28T03:24:48.116" v="170" actId="20577"/>
+          <ac:spMkLst>
+            <pc:docMk/>
+            <pc:sldMk cId="2601406605" sldId="327"/>
+            <ac:spMk id="2" creationId="{24C36D73-A7E3-49B1-A6E3-FD11EB55BDA9}"/>
+          </ac:spMkLst>
+        </pc:spChg>
+        <pc:spChg chg="mod">
+          <ac:chgData name="Wang Jian-Sheng" userId="7d25d710-0931-49a3-acef-49192cec40f2" providerId="ADAL" clId="{06E45FE4-345D-4175-8A06-9288CBB6B74A}" dt="2026-09-28T03:38:05.281" v="334" actId="20577"/>
+          <ac:spMkLst>
+            <pc:docMk/>
+            <pc:sldMk cId="2601406605" sldId="327"/>
+            <ac:spMk id="3" creationId="{B17C5DAF-47C6-46B4-936A-BADAAE76F7A0}"/>
+          </ac:spMkLst>
+        </pc:spChg>
+      </pc:sldChg>
+      <pc:sldChg chg="modSp">
+        <pc:chgData name="Wang Jian-Sheng" userId="7d25d710-0931-49a3-acef-49192cec40f2" providerId="ADAL" clId="{06E45FE4-345D-4175-8A06-9288CBB6B74A}" dt="2026-09-28T03:26:50.445" v="196" actId="20577"/>
+        <pc:sldMkLst>
+          <pc:docMk/>
+          <pc:sldMk cId="1446154106" sldId="328"/>
+        </pc:sldMkLst>
+        <pc:spChg chg="mod">
+          <ac:chgData name="Wang Jian-Sheng" userId="7d25d710-0931-49a3-acef-49192cec40f2" providerId="ADAL" clId="{06E45FE4-345D-4175-8A06-9288CBB6B74A}" dt="2026-09-28T03:26:50.445" v="196" actId="20577"/>
+          <ac:spMkLst>
+            <pc:docMk/>
+            <pc:sldMk cId="1446154106" sldId="328"/>
+            <ac:spMk id="2" creationId="{7839CD01-08D0-4A04-A2B5-C9C55635090C}"/>
+          </ac:spMkLst>
+        </pc:spChg>
+      </pc:sldChg>
+      <pc:sldChg chg="modSp">
+        <pc:chgData name="Wang Jian-Sheng" userId="7d25d710-0931-49a3-acef-49192cec40f2" providerId="ADAL" clId="{06E45FE4-345D-4175-8A06-9288CBB6B74A}" dt="2026-09-28T03:36:12.954" v="322" actId="20577"/>
+        <pc:sldMkLst>
+          <pc:docMk/>
+          <pc:sldMk cId="1401114437" sldId="329"/>
+        </pc:sldMkLst>
+        <pc:spChg chg="mod">
+          <ac:chgData name="Wang Jian-Sheng" userId="7d25d710-0931-49a3-acef-49192cec40f2" providerId="ADAL" clId="{06E45FE4-345D-4175-8A06-9288CBB6B74A}" dt="2026-09-28T03:36:12.954" v="322" actId="20577"/>
+          <ac:spMkLst>
+            <pc:docMk/>
+            <pc:sldMk cId="1401114437" sldId="329"/>
+            <ac:spMk id="3" creationId="{206C1728-9900-499E-AC02-15A154A4D4F8}"/>
+          </ac:spMkLst>
+        </pc:spChg>
+      </pc:sldChg>
+      <pc:sldChg chg="modSp">
+        <pc:chgData name="Wang Jian-Sheng" userId="7d25d710-0931-49a3-acef-49192cec40f2" providerId="ADAL" clId="{06E45FE4-345D-4175-8A06-9288CBB6B74A}" dt="2026-09-28T03:14:36.939" v="31" actId="20577"/>
+        <pc:sldMkLst>
+          <pc:docMk/>
+          <pc:sldMk cId="1591152960" sldId="330"/>
+        </pc:sldMkLst>
+        <pc:spChg chg="mod">
+          <ac:chgData name="Wang Jian-Sheng" userId="7d25d710-0931-49a3-acef-49192cec40f2" providerId="ADAL" clId="{06E45FE4-345D-4175-8A06-9288CBB6B74A}" dt="2026-09-28T03:14:36.939" v="31" actId="20577"/>
+          <ac:spMkLst>
+            <pc:docMk/>
+            <pc:sldMk cId="1591152960" sldId="330"/>
+            <ac:spMk id="3" creationId="{150C5CCE-2493-4CD8-8A94-9D8DA106EB42}"/>
+          </ac:spMkLst>
+        </pc:spChg>
+      </pc:sldChg>
+    </pc:docChg>
+  </pc:docChgLst>
+  <pc:docChgLst>
     <pc:chgData name="Wang Jian-Sheng" userId="7d25d710-0931-49a3-acef-49192cec40f2" providerId="ADAL" clId="{29A95C52-1A2D-45DD-BB32-7F8F316EB969}"/>
   </pc:docChgLst>
   <pc:docChgLst>
@@ -148,13 +329,6 @@
       <pc:docMkLst>
         <pc:docMk/>
       </pc:docMkLst>
-      <pc:sldChg chg="del">
-        <pc:chgData name="Wang Jian-Sheng" userId="7d25d710-0931-49a3-acef-49192cec40f2" providerId="ADAL" clId="{4D5FEF8F-947C-499B-B19D-0DD4942C3FAD}" dt="2026-08-24T03:39:22.866" v="206" actId="2696"/>
-        <pc:sldMkLst>
-          <pc:docMk/>
-          <pc:sldMk cId="1393800975" sldId="314"/>
-        </pc:sldMkLst>
-      </pc:sldChg>
       <pc:sldChg chg="modSp add">
         <pc:chgData name="Wang Jian-Sheng" userId="7d25d710-0931-49a3-acef-49192cec40f2" providerId="ADAL" clId="{4D5FEF8F-947C-499B-B19D-0DD4942C3FAD}" dt="2026-08-24T06:39:08.267" v="1587" actId="20577"/>
         <pc:sldMkLst>
@@ -169,44 +343,6 @@
             <ac:spMk id="3" creationId="{475794ED-3E24-36F7-0208-95B5F1C4FB77}"/>
           </ac:spMkLst>
         </pc:spChg>
-      </pc:sldChg>
-      <pc:sldChg chg="addSp modSp add modNotesTx">
-        <pc:chgData name="Wang Jian-Sheng" userId="7d25d710-0931-49a3-acef-49192cec40f2" providerId="ADAL" clId="{4D5FEF8F-947C-499B-B19D-0DD4942C3FAD}" dt="2026-08-24T07:26:31.926" v="2294" actId="20577"/>
-        <pc:sldMkLst>
-          <pc:docMk/>
-          <pc:sldMk cId="881298221" sldId="315"/>
-        </pc:sldMkLst>
-        <pc:spChg chg="mod">
-          <ac:chgData name="Wang Jian-Sheng" userId="7d25d710-0931-49a3-acef-49192cec40f2" providerId="ADAL" clId="{4D5FEF8F-947C-499B-B19D-0DD4942C3FAD}" dt="2026-08-24T03:49:17.874" v="211" actId="1076"/>
-          <ac:spMkLst>
-            <pc:docMk/>
-            <pc:sldMk cId="881298221" sldId="315"/>
-            <ac:spMk id="5" creationId="{2D6C63DC-2224-72C2-809F-5268BE9333D5}"/>
-          </ac:spMkLst>
-        </pc:spChg>
-        <pc:spChg chg="add mod">
-          <ac:chgData name="Wang Jian-Sheng" userId="7d25d710-0931-49a3-acef-49192cec40f2" providerId="ADAL" clId="{4D5FEF8F-947C-499B-B19D-0DD4942C3FAD}" dt="2026-08-24T03:50:41.456" v="254" actId="947"/>
-          <ac:spMkLst>
-            <pc:docMk/>
-            <pc:sldMk cId="881298221" sldId="315"/>
-            <ac:spMk id="6" creationId="{8EE29AA5-FC3E-4840-8AC3-314A7001F313}"/>
-          </ac:spMkLst>
-        </pc:spChg>
-        <pc:spChg chg="add mod">
-          <ac:chgData name="Wang Jian-Sheng" userId="7d25d710-0931-49a3-acef-49192cec40f2" providerId="ADAL" clId="{4D5FEF8F-947C-499B-B19D-0DD4942C3FAD}" dt="2026-08-24T06:56:07.961" v="2129" actId="1076"/>
-          <ac:spMkLst>
-            <pc:docMk/>
-            <pc:sldMk cId="881298221" sldId="315"/>
-            <ac:spMk id="8" creationId="{6D27DDCE-B5E5-4594-B821-FD17067A29CB}"/>
-          </ac:spMkLst>
-        </pc:spChg>
-      </pc:sldChg>
-      <pc:sldChg chg="del">
-        <pc:chgData name="Wang Jian-Sheng" userId="7d25d710-0931-49a3-acef-49192cec40f2" providerId="ADAL" clId="{4D5FEF8F-947C-499B-B19D-0DD4942C3FAD}" dt="2026-08-24T03:39:22.940" v="207" actId="2696"/>
-        <pc:sldMkLst>
-          <pc:docMk/>
-          <pc:sldMk cId="2667853044" sldId="315"/>
-        </pc:sldMkLst>
       </pc:sldChg>
       <pc:sldChg chg="modSp">
         <pc:chgData name="Wang Jian-Sheng" userId="7d25d710-0931-49a3-acef-49192cec40f2" providerId="ADAL" clId="{4D5FEF8F-947C-499B-B19D-0DD4942C3FAD}" dt="2026-08-24T07:12:26.125" v="2205" actId="20577"/>
@@ -816,7 +952,7 @@
           <a:p>
             <a:fld id="{B1C5323C-DA4A-438F-B55F-27209206FB23}" type="datetimeFigureOut">
               <a:rPr lang="en-SG" smtClean="0"/>
-              <a:t>24/8/2026</a:t>
+              <a:t>28/9/2026</a:t>
             </a:fld>
             <a:endParaRPr lang="en-SG"/>
           </a:p>
@@ -1218,7 +1354,23 @@
           <a:p>
             <a:r>
               <a:rPr lang="en-US" dirty="0"/>
-              <a:t>Why weight decay?   1) prefer a simpler model with small w (e.g. low order polynomials), 2)  small prior for w, 3) make stable fit in linear regression when number of data is less than the number of parameters. </a:t>
+              <a:t>Noise in </a:t>
+            </a:r>
+            <a:r>
+              <a:rPr lang="en-US"/>
+              <a:t>the data?  </a:t>
+            </a:r>
+            <a:r>
+              <a:rPr lang="en-US" dirty="0"/>
+              <a:t>To get a 3</a:t>
+            </a:r>
+            <a:r>
+              <a:rPr lang="en-US" baseline="30000" dirty="0"/>
+              <a:t>rd</a:t>
+            </a:r>
+            <a:r>
+              <a:rPr lang="en-US" dirty="0"/>
+              <a:t> term?</a:t>
             </a:r>
             <a:endParaRPr lang="en-SG" dirty="0"/>
           </a:p>
@@ -1241,7 +1393,7 @@
           <a:p>
             <a:fld id="{1B96A136-CBA9-41BE-B678-BB635CF2BB08}" type="slidenum">
               <a:rPr lang="en-SG" smtClean="0"/>
-              <a:t>6</a:t>
+              <a:t>3</a:t>
             </a:fld>
             <a:endParaRPr lang="en-SG"/>
           </a:p>
@@ -1250,7 +1402,7 @@
     </p:spTree>
     <p:extLst>
       <p:ext uri="{BB962C8B-B14F-4D97-AF65-F5344CB8AC3E}">
-        <p14:creationId xmlns:p14="http://schemas.microsoft.com/office/powerpoint/2010/main" val="1725075096"/>
+        <p14:creationId xmlns:p14="http://schemas.microsoft.com/office/powerpoint/2010/main" val="1027904978"/>
       </p:ext>
     </p:extLst>
   </p:cSld>
@@ -1306,23 +1458,7 @@
           <a:p>
             <a:r>
               <a:rPr lang="en-US" dirty="0"/>
-              <a:t>Noise in </a:t>
-            </a:r>
-            <a:r>
-              <a:rPr lang="en-US"/>
-              <a:t>the data?  </a:t>
-            </a:r>
-            <a:r>
-              <a:rPr lang="en-US" dirty="0"/>
-              <a:t>To get a 3</a:t>
-            </a:r>
-            <a:r>
-              <a:rPr lang="en-US" baseline="30000" dirty="0"/>
-              <a:t>rd</a:t>
-            </a:r>
-            <a:r>
-              <a:rPr lang="en-US" dirty="0"/>
-              <a:t> term?</a:t>
+              <a:t>Regularize with symmetry ,  extra term \lambda || f(Tx) – f(x) ||^2 if f is invariant under T. </a:t>
             </a:r>
             <a:endParaRPr lang="en-SG" dirty="0"/>
           </a:p>
@@ -1345,7 +1481,7 @@
           <a:p>
             <a:fld id="{1B96A136-CBA9-41BE-B678-BB635CF2BB08}" type="slidenum">
               <a:rPr lang="en-SG" smtClean="0"/>
-              <a:t>7</a:t>
+              <a:t>5</a:t>
             </a:fld>
             <a:endParaRPr lang="en-SG"/>
           </a:p>
@@ -1354,7 +1490,7 @@
     </p:spTree>
     <p:extLst>
       <p:ext uri="{BB962C8B-B14F-4D97-AF65-F5344CB8AC3E}">
-        <p14:creationId xmlns:p14="http://schemas.microsoft.com/office/powerpoint/2010/main" val="1833610676"/>
+        <p14:creationId xmlns:p14="http://schemas.microsoft.com/office/powerpoint/2010/main" val="1966877832"/>
       </p:ext>
     </p:extLst>
   </p:cSld>
@@ -1410,55 +1546,7 @@
           <a:p>
             <a:r>
               <a:rPr lang="en-US" dirty="0"/>
-              <a:t>Note the posterior distribution is p(</a:t>
-            </a:r>
-            <a:r>
-              <a:rPr lang="en-US" dirty="0" err="1"/>
-              <a:t>w|X</a:t>
-            </a:r>
-            <a:r>
-              <a:rPr lang="en-US" dirty="0"/>
-              <a:t>) = p(</a:t>
-            </a:r>
-            <a:r>
-              <a:rPr lang="en-US" dirty="0" err="1"/>
-              <a:t>X|w</a:t>
-            </a:r>
-            <a:r>
-              <a:rPr lang="en-US" dirty="0"/>
-              <a:t>) p(w)/p(X), according to Bayes’ theorem. p(</a:t>
-            </a:r>
-            <a:r>
-              <a:rPr lang="en-US" dirty="0" err="1"/>
-              <a:t>X|w</a:t>
-            </a:r>
-            <a:r>
-              <a:rPr lang="en-US" dirty="0"/>
-              <a:t>) = L(</a:t>
-            </a:r>
-            <a:r>
-              <a:rPr lang="en-US" dirty="0" err="1"/>
-              <a:t>w;X</a:t>
-            </a:r>
-            <a:r>
-              <a:rPr lang="en-US" dirty="0"/>
-              <a:t>) is the likelihood.   Max p(</a:t>
-            </a:r>
-            <a:r>
-              <a:rPr lang="en-US" dirty="0" err="1"/>
-              <a:t>w|X</a:t>
-            </a:r>
-            <a:r>
-              <a:rPr lang="en-US" dirty="0"/>
-              <a:t>) with respect to w is the same as max L(</a:t>
-            </a:r>
-            <a:r>
-              <a:rPr lang="en-US" dirty="0" err="1"/>
-              <a:t>w;X</a:t>
-            </a:r>
-            <a:r>
-              <a:rPr lang="en-US" dirty="0"/>
-              <a:t>)p(w) since P(X) is a constant. </a:t>
+              <a:t>Why weight decay?   1) prefer a simpler model with small w (e.g. low order polynomials), 2)  small prior for w, 3) make stable fit in linear regression when number of data is less than the number of parameters. </a:t>
             </a:r>
             <a:endParaRPr lang="en-SG" dirty="0"/>
           </a:p>
@@ -1481,7 +1569,7 @@
           <a:p>
             <a:fld id="{1B96A136-CBA9-41BE-B678-BB635CF2BB08}" type="slidenum">
               <a:rPr lang="en-SG" smtClean="0"/>
-              <a:t>8</a:t>
+              <a:t>7</a:t>
             </a:fld>
             <a:endParaRPr lang="en-SG"/>
           </a:p>
@@ -1490,7 +1578,7 @@
     </p:spTree>
     <p:extLst>
       <p:ext uri="{BB962C8B-B14F-4D97-AF65-F5344CB8AC3E}">
-        <p14:creationId xmlns:p14="http://schemas.microsoft.com/office/powerpoint/2010/main" val="4109690063"/>
+        <p14:creationId xmlns:p14="http://schemas.microsoft.com/office/powerpoint/2010/main" val="1725075096"/>
       </p:ext>
     </p:extLst>
   </p:cSld>
@@ -1546,7 +1634,55 @@
           <a:p>
             <a:r>
               <a:rPr lang="en-US" dirty="0"/>
-              <a:t>L2:  the minimum w* is shifted to  1/(lambda/H+1) w*.  L1:   Assume w*&gt; 0,  w* is shifted down to a smaller value of w* - lambda/H.    If w*-lambda/H &lt; 0, the minimum is at 0. </a:t>
+              <a:t>Note the posterior distribution is p(</a:t>
+            </a:r>
+            <a:r>
+              <a:rPr lang="en-US" dirty="0" err="1"/>
+              <a:t>w|X</a:t>
+            </a:r>
+            <a:r>
+              <a:rPr lang="en-US" dirty="0"/>
+              <a:t>) = p(</a:t>
+            </a:r>
+            <a:r>
+              <a:rPr lang="en-US" dirty="0" err="1"/>
+              <a:t>X|w</a:t>
+            </a:r>
+            <a:r>
+              <a:rPr lang="en-US" dirty="0"/>
+              <a:t>) p(w)/p(X), according to Bayes’ theorem. p(</a:t>
+            </a:r>
+            <a:r>
+              <a:rPr lang="en-US" dirty="0" err="1"/>
+              <a:t>X|w</a:t>
+            </a:r>
+            <a:r>
+              <a:rPr lang="en-US" dirty="0"/>
+              <a:t>) = L(</a:t>
+            </a:r>
+            <a:r>
+              <a:rPr lang="en-US" dirty="0" err="1"/>
+              <a:t>w;X</a:t>
+            </a:r>
+            <a:r>
+              <a:rPr lang="en-US" dirty="0"/>
+              <a:t>) is the likelihood.   Max p(</a:t>
+            </a:r>
+            <a:r>
+              <a:rPr lang="en-US" dirty="0" err="1"/>
+              <a:t>w|X</a:t>
+            </a:r>
+            <a:r>
+              <a:rPr lang="en-US" dirty="0"/>
+              <a:t>) with respect to w is the same as max L(</a:t>
+            </a:r>
+            <a:r>
+              <a:rPr lang="en-US" dirty="0" err="1"/>
+              <a:t>w;X</a:t>
+            </a:r>
+            <a:r>
+              <a:rPr lang="en-US" dirty="0"/>
+              <a:t>)p(w) since P(X) is a constant. </a:t>
             </a:r>
             <a:endParaRPr lang="en-SG" dirty="0"/>
           </a:p>
@@ -1569,7 +1705,7 @@
           <a:p>
             <a:fld id="{1B96A136-CBA9-41BE-B678-BB635CF2BB08}" type="slidenum">
               <a:rPr lang="en-SG" smtClean="0"/>
-              <a:t>11</a:t>
+              <a:t>8</a:t>
             </a:fld>
             <a:endParaRPr lang="en-SG"/>
           </a:p>
@@ -1578,7 +1714,7 @@
     </p:spTree>
     <p:extLst>
       <p:ext uri="{BB962C8B-B14F-4D97-AF65-F5344CB8AC3E}">
-        <p14:creationId xmlns:p14="http://schemas.microsoft.com/office/powerpoint/2010/main" val="419695351"/>
+        <p14:creationId xmlns:p14="http://schemas.microsoft.com/office/powerpoint/2010/main" val="4109690063"/>
       </p:ext>
     </p:extLst>
   </p:cSld>
@@ -1634,10 +1770,8 @@
           <a:p>
             <a:r>
               <a:rPr lang="en-US" dirty="0"/>
-              <a:t>This is so if we start from w close to 0, of course.</a:t>
-            </a:r>
-          </a:p>
-          <a:p>
+              <a:t>L2:  the minimum w* is shifted to  1/(lambda/H+1) w*.  L1:   Assume w*&gt; 0,  w* is shifted down to a smaller value of w* - lambda/H.    If w*-lambda/H &lt; 0, the minimum is at 0. </a:t>
+            </a:r>
             <a:endParaRPr lang="en-SG" dirty="0"/>
           </a:p>
         </p:txBody>
@@ -1659,6 +1793,96 @@
           <a:p>
             <a:fld id="{1B96A136-CBA9-41BE-B678-BB635CF2BB08}" type="slidenum">
               <a:rPr lang="en-SG" smtClean="0"/>
+              <a:t>11</a:t>
+            </a:fld>
+            <a:endParaRPr lang="en-SG"/>
+          </a:p>
+        </p:txBody>
+      </p:sp>
+    </p:spTree>
+    <p:extLst>
+      <p:ext uri="{BB962C8B-B14F-4D97-AF65-F5344CB8AC3E}">
+        <p14:creationId xmlns:p14="http://schemas.microsoft.com/office/powerpoint/2010/main" val="419695351"/>
+      </p:ext>
+    </p:extLst>
+  </p:cSld>
+  <p:clrMapOvr>
+    <a:masterClrMapping/>
+  </p:clrMapOvr>
+</p:notes>
+</file>
+
+<file path=ppt/notesSlides/notesSlide7.xml><?xml version="1.0" encoding="utf-8"?>
+<p:notes xmlns:a="http://schemas.openxmlformats.org/drawingml/2006/main" xmlns:r="http://schemas.openxmlformats.org/officeDocument/2006/relationships" xmlns:p="http://schemas.openxmlformats.org/presentationml/2006/main">
+  <p:cSld>
+    <p:spTree>
+      <p:nvGrpSpPr>
+        <p:cNvPr id="1" name=""/>
+        <p:cNvGrpSpPr/>
+        <p:nvPr/>
+      </p:nvGrpSpPr>
+      <p:grpSpPr>
+        <a:xfrm>
+          <a:off x="0" y="0"/>
+          <a:ext cx="0" cy="0"/>
+          <a:chOff x="0" y="0"/>
+          <a:chExt cx="0" cy="0"/>
+        </a:xfrm>
+      </p:grpSpPr>
+      <p:sp>
+        <p:nvSpPr>
+          <p:cNvPr id="2" name="Slide Image Placeholder 1"/>
+          <p:cNvSpPr>
+            <a:spLocks noGrp="1" noRot="1" noChangeAspect="1"/>
+          </p:cNvSpPr>
+          <p:nvPr>
+            <p:ph type="sldImg"/>
+          </p:nvPr>
+        </p:nvSpPr>
+        <p:spPr/>
+      </p:sp>
+      <p:sp>
+        <p:nvSpPr>
+          <p:cNvPr id="3" name="Notes Placeholder 2"/>
+          <p:cNvSpPr>
+            <a:spLocks noGrp="1"/>
+          </p:cNvSpPr>
+          <p:nvPr>
+            <p:ph type="body" idx="1"/>
+          </p:nvPr>
+        </p:nvSpPr>
+        <p:spPr/>
+        <p:txBody>
+          <a:bodyPr/>
+          <a:lstStyle/>
+          <a:p>
+            <a:r>
+              <a:rPr lang="en-US" dirty="0"/>
+              <a:t>This is so if we start from w close to 0, of course.</a:t>
+            </a:r>
+          </a:p>
+          <a:p>
+            <a:endParaRPr lang="en-SG" dirty="0"/>
+          </a:p>
+        </p:txBody>
+      </p:sp>
+      <p:sp>
+        <p:nvSpPr>
+          <p:cNvPr id="4" name="Slide Number Placeholder 3"/>
+          <p:cNvSpPr>
+            <a:spLocks noGrp="1"/>
+          </p:cNvSpPr>
+          <p:nvPr>
+            <p:ph type="sldNum" sz="quarter" idx="5"/>
+          </p:nvPr>
+        </p:nvSpPr>
+        <p:spPr/>
+        <p:txBody>
+          <a:bodyPr/>
+          <a:lstStyle/>
+          <a:p>
+            <a:fld id="{1B96A136-CBA9-41BE-B678-BB635CF2BB08}" type="slidenum">
+              <a:rPr lang="en-SG" smtClean="0"/>
               <a:t>16</a:t>
             </a:fld>
             <a:endParaRPr lang="en-SG"/>
@@ -1678,7 +1902,7 @@
 </p:notes>
 </file>
 
-<file path=ppt/notesSlides/notesSlide7.xml><?xml version="1.0" encoding="utf-8"?>
+<file path=ppt/notesSlides/notesSlide8.xml><?xml version="1.0" encoding="utf-8"?>
 <p:notes xmlns:a="http://schemas.openxmlformats.org/drawingml/2006/main" xmlns:r="http://schemas.openxmlformats.org/officeDocument/2006/relationships" xmlns:p="http://schemas.openxmlformats.org/presentationml/2006/main">
   <p:cSld>
     <p:spTree>
@@ -1901,7 +2125,7 @@
           <a:p>
             <a:fld id="{A489F94C-8A6A-45FE-82A9-DD9AF81D1AD4}" type="datetimeFigureOut">
               <a:rPr lang="en-US" smtClean="0"/>
-              <a:t>8/24/2026</a:t>
+              <a:t>9/28/2026</a:t>
             </a:fld>
             <a:endParaRPr lang="en-US"/>
           </a:p>
@@ -2071,7 +2295,7 @@
           <a:p>
             <a:fld id="{A489F94C-8A6A-45FE-82A9-DD9AF81D1AD4}" type="datetimeFigureOut">
               <a:rPr lang="en-US" smtClean="0"/>
-              <a:t>8/24/2026</a:t>
+              <a:t>9/28/2026</a:t>
             </a:fld>
             <a:endParaRPr lang="en-US"/>
           </a:p>
@@ -2251,7 +2475,7 @@
           <a:p>
             <a:fld id="{A489F94C-8A6A-45FE-82A9-DD9AF81D1AD4}" type="datetimeFigureOut">
               <a:rPr lang="en-US" smtClean="0"/>
-              <a:t>8/24/2026</a:t>
+              <a:t>9/28/2026</a:t>
             </a:fld>
             <a:endParaRPr lang="en-US"/>
           </a:p>
@@ -2457,7 +2681,7 @@
           <a:p>
             <a:fld id="{A489F94C-8A6A-45FE-82A9-DD9AF81D1AD4}" type="datetimeFigureOut">
               <a:rPr lang="en-US" smtClean="0"/>
-              <a:t>8/24/2026</a:t>
+              <a:t>9/28/2026</a:t>
             </a:fld>
             <a:endParaRPr lang="en-US"/>
           </a:p>
@@ -2701,7 +2925,7 @@
           <a:p>
             <a:fld id="{A489F94C-8A6A-45FE-82A9-DD9AF81D1AD4}" type="datetimeFigureOut">
               <a:rPr lang="en-US" smtClean="0"/>
-              <a:t>8/24/2026</a:t>
+              <a:t>9/28/2026</a:t>
             </a:fld>
             <a:endParaRPr lang="en-US"/>
           </a:p>
@@ -2933,7 +3157,7 @@
           <a:p>
             <a:fld id="{A489F94C-8A6A-45FE-82A9-DD9AF81D1AD4}" type="datetimeFigureOut">
               <a:rPr lang="en-US" smtClean="0"/>
-              <a:t>8/24/2026</a:t>
+              <a:t>9/28/2026</a:t>
             </a:fld>
             <a:endParaRPr lang="en-US"/>
           </a:p>
@@ -3300,7 +3524,7 @@
           <a:p>
             <a:fld id="{A489F94C-8A6A-45FE-82A9-DD9AF81D1AD4}" type="datetimeFigureOut">
               <a:rPr lang="en-US" smtClean="0"/>
-              <a:t>8/24/2026</a:t>
+              <a:t>9/28/2026</a:t>
             </a:fld>
             <a:endParaRPr lang="en-US"/>
           </a:p>
@@ -3418,7 +3642,7 @@
           <a:p>
             <a:fld id="{A489F94C-8A6A-45FE-82A9-DD9AF81D1AD4}" type="datetimeFigureOut">
               <a:rPr lang="en-US" smtClean="0"/>
-              <a:t>8/24/2026</a:t>
+              <a:t>9/28/2026</a:t>
             </a:fld>
             <a:endParaRPr lang="en-US"/>
           </a:p>
@@ -3513,7 +3737,7 @@
           <a:p>
             <a:fld id="{A489F94C-8A6A-45FE-82A9-DD9AF81D1AD4}" type="datetimeFigureOut">
               <a:rPr lang="en-US" smtClean="0"/>
-              <a:t>8/24/2026</a:t>
+              <a:t>9/28/2026</a:t>
             </a:fld>
             <a:endParaRPr lang="en-US"/>
           </a:p>
@@ -3790,7 +4014,7 @@
           <a:p>
             <a:fld id="{A489F94C-8A6A-45FE-82A9-DD9AF81D1AD4}" type="datetimeFigureOut">
               <a:rPr lang="en-US" smtClean="0"/>
-              <a:t>8/24/2026</a:t>
+              <a:t>9/28/2026</a:t>
             </a:fld>
             <a:endParaRPr lang="en-US"/>
           </a:p>
@@ -4047,7 +4271,7 @@
           <a:p>
             <a:fld id="{A489F94C-8A6A-45FE-82A9-DD9AF81D1AD4}" type="datetimeFigureOut">
               <a:rPr lang="en-US" smtClean="0"/>
-              <a:t>8/24/2026</a:t>
+              <a:t>9/28/2026</a:t>
             </a:fld>
             <a:endParaRPr lang="en-US"/>
           </a:p>
@@ -4260,7 +4484,7 @@
           <a:p>
             <a:fld id="{A489F94C-8A6A-45FE-82A9-DD9AF81D1AD4}" type="datetimeFigureOut">
               <a:rPr lang="en-US" smtClean="0"/>
-              <a:t>8/24/2026</a:t>
+              <a:t>9/28/2026</a:t>
             </a:fld>
             <a:endParaRPr lang="en-US"/>
           </a:p>
@@ -8888,7 +9112,7 @@
           <a:p>
             <a:r>
               <a:rPr lang="en-US" dirty="0"/>
-              <a:t>Dataset augmentation</a:t>
+              <a:t>Data augmentation</a:t>
             </a:r>
             <a:endParaRPr lang="en-SG" dirty="0"/>
           </a:p>
@@ -8917,7 +9141,7 @@
           <a:p>
             <a:r>
               <a:rPr lang="en-US" dirty="0"/>
-              <a:t>Generate additional training data by, such as translations, rotations, …</a:t>
+              <a:t>Generate additional training data by, e.g., translations, rotations, …</a:t>
             </a:r>
           </a:p>
           <a:p>
@@ -9299,14 +9523,14 @@
           <a:p>
             <a:r>
               <a:rPr lang="en-US" dirty="0"/>
-              <a:t>Early stopping is equivalent to weight decay</a:t>
+              <a:t>Early stopping can act like weight decay</a:t>
             </a:r>
             <a:endParaRPr lang="en-SG" dirty="0"/>
           </a:p>
         </p:txBody>
       </p:sp>
-      <mc:AlternateContent xmlns:mc="http://schemas.openxmlformats.org/markup-compatibility/2006">
-        <mc:Choice xmlns:a14="http://schemas.microsoft.com/office/drawing/2010/main" Requires="a14">
+      <mc:AlternateContent xmlns:mc="http://schemas.openxmlformats.org/markup-compatibility/2006" xmlns:a14="http://schemas.microsoft.com/office/drawing/2010/main">
+        <mc:Choice Requires="a14">
           <p:sp>
             <p:nvSpPr>
               <p:cNvPr id="3" name="Content Placeholder 2">
@@ -9839,7 +10063,7 @@
             </p:txBody>
           </p:sp>
         </mc:Choice>
-        <mc:Fallback>
+        <mc:Fallback xmlns="">
           <p:sp>
             <p:nvSpPr>
               <p:cNvPr id="3" name="Content Placeholder 2">
@@ -11126,19 +11350,11 @@
           <a:p>
             <a:r>
               <a:rPr lang="en-US" dirty="0"/>
-              <a:t>Nodes and their connections are deleted </a:t>
-            </a:r>
-            <a:r>
-              <a:rPr lang="en-US"/>
-              <a:t>at random </a:t>
-            </a:r>
-            <a:r>
-              <a:rPr lang="en-US" dirty="0"/>
-              <a:t>for each train iteration.</a:t>
+              <a:t>Nodes and their connections are deleted at random at each training iteration.</a:t>
             </a:r>
             <a:r>
               <a:rPr lang="en-SG" dirty="0"/>
-              <a:t>  It is an implicit way to perform approximate model average over exponentially many models.</a:t>
+              <a:t>  It is an implicit way to perform approximate model averaging over exponentially many models.</a:t>
             </a:r>
           </a:p>
           <a:p>
@@ -11260,20 +11476,20 @@
           <a:p>
             <a:r>
               <a:rPr lang="en-US" dirty="0"/>
+              <a:t>Bias-variance trade-off</a:t>
+            </a:r>
+          </a:p>
+          <a:p>
+            <a:endParaRPr lang="en-US" dirty="0"/>
+          </a:p>
+          <a:p>
+            <a:r>
+              <a:rPr lang="en-US" dirty="0"/>
               <a:t>Inductive bias</a:t>
             </a:r>
           </a:p>
           <a:p>
-            <a:r>
-              <a:rPr lang="en-US" dirty="0"/>
-              <a:t>Bias-variance trade-off</a:t>
-            </a:r>
-          </a:p>
-          <a:p>
-            <a:r>
-              <a:rPr lang="en-US" dirty="0"/>
-              <a:t>Discuss various ways for neural networks to generalize better</a:t>
-            </a:r>
+            <a:endParaRPr lang="en-US" dirty="0"/>
           </a:p>
           <a:p>
             <a:r>
@@ -11413,7 +11629,7 @@
           <a:p>
             <a:r>
               <a:rPr lang="en-US" dirty="0"/>
-              <a:t>1) inductive bias, 2) invariance vs equivariance, 3) what is regularization? 4) what is bias-variance trade-off? 5) what is weight decay, 6) difference/similarity of L</a:t>
+              <a:t>1) inductive bias, 2) invariance vs equivariance, 3) what is a regularization? 4) what is bias-variance trade-off? 5) what is weight decay, 6) difference/similarity of L</a:t>
             </a:r>
             <a:r>
               <a:rPr lang="en-US" baseline="-25000" dirty="0"/>
@@ -11700,1203 +11916,6 @@
 </file>
 
 <file path=ppt/slides/slide3.xml><?xml version="1.0" encoding="utf-8"?>
-<p:sld xmlns:a="http://schemas.openxmlformats.org/drawingml/2006/main" xmlns:r="http://schemas.openxmlformats.org/officeDocument/2006/relationships" xmlns:p="http://schemas.openxmlformats.org/presentationml/2006/main">
-  <p:cSld>
-    <p:spTree>
-      <p:nvGrpSpPr>
-        <p:cNvPr id="1" name=""/>
-        <p:cNvGrpSpPr/>
-        <p:nvPr/>
-      </p:nvGrpSpPr>
-      <p:grpSpPr>
-        <a:xfrm>
-          <a:off x="0" y="0"/>
-          <a:ext cx="0" cy="0"/>
-          <a:chOff x="0" y="0"/>
-          <a:chExt cx="0" cy="0"/>
-        </a:xfrm>
-      </p:grpSpPr>
-      <p:sp>
-        <p:nvSpPr>
-          <p:cNvPr id="2" name="Title 1">
-            <a:extLst>
-              <a:ext uri="{FF2B5EF4-FFF2-40B4-BE49-F238E27FC236}">
-                <a16:creationId xmlns:a16="http://schemas.microsoft.com/office/drawing/2014/main" id="{69CC3191-D0C5-DBEE-B54D-A72D173E1376}"/>
-              </a:ext>
-            </a:extLst>
-          </p:cNvPr>
-          <p:cNvSpPr>
-            <a:spLocks noGrp="1"/>
-          </p:cNvSpPr>
-          <p:nvPr>
-            <p:ph type="title"/>
-          </p:nvPr>
-        </p:nvSpPr>
-        <p:spPr/>
-        <p:txBody>
-          <a:bodyPr/>
-          <a:lstStyle/>
-          <a:p>
-            <a:r>
-              <a:rPr lang="en-US" dirty="0"/>
-              <a:t>Inductive bias</a:t>
-            </a:r>
-            <a:endParaRPr lang="en-SG" dirty="0"/>
-          </a:p>
-        </p:txBody>
-      </p:sp>
-      <p:sp>
-        <p:nvSpPr>
-          <p:cNvPr id="3" name="Content Placeholder 2">
-            <a:extLst>
-              <a:ext uri="{FF2B5EF4-FFF2-40B4-BE49-F238E27FC236}">
-                <a16:creationId xmlns:a16="http://schemas.microsoft.com/office/drawing/2014/main" id="{3AD0DA7D-BE99-57F0-F543-E534995716AF}"/>
-              </a:ext>
-            </a:extLst>
-          </p:cNvPr>
-          <p:cNvSpPr>
-            <a:spLocks noGrp="1"/>
-          </p:cNvSpPr>
-          <p:nvPr>
-            <p:ph idx="1"/>
-          </p:nvPr>
-        </p:nvSpPr>
-        <p:spPr/>
-        <p:txBody>
-          <a:bodyPr>
-            <a:normAutofit/>
-          </a:bodyPr>
-          <a:lstStyle/>
-          <a:p>
-            <a:r>
-              <a:rPr lang="en-US" dirty="0"/>
-              <a:t>A set of assumptions about the data in order to predict well in machine learning, e.g., smoothness of the data, certain symmetries, etc.</a:t>
-            </a:r>
-          </a:p>
-          <a:p>
-            <a:pPr lvl="1"/>
-            <a:endParaRPr lang="en-US" dirty="0"/>
-          </a:p>
-          <a:p>
-            <a:pPr lvl="1"/>
-            <a:r>
-              <a:rPr lang="en-US" dirty="0"/>
-              <a:t>Inverse problem – infer a function or probability distribution from data</a:t>
-            </a:r>
-          </a:p>
-          <a:p>
-            <a:pPr lvl="1"/>
-            <a:r>
-              <a:rPr lang="en-US" dirty="0"/>
-              <a:t>No free lunch theorem –  averaged uniformly over all possible problems, all learning algorithms perform equally well. </a:t>
-            </a:r>
-          </a:p>
-          <a:p>
-            <a:pPr lvl="1"/>
-            <a:endParaRPr lang="en-US" dirty="0"/>
-          </a:p>
-        </p:txBody>
-      </p:sp>
-    </p:spTree>
-    <p:extLst>
-      <p:ext uri="{BB962C8B-B14F-4D97-AF65-F5344CB8AC3E}">
-        <p14:creationId xmlns:p14="http://schemas.microsoft.com/office/powerpoint/2010/main" val="708994579"/>
-      </p:ext>
-    </p:extLst>
-  </p:cSld>
-  <p:clrMapOvr>
-    <a:masterClrMapping/>
-  </p:clrMapOvr>
-</p:sld>
-</file>
-
-<file path=ppt/slides/slide4.xml><?xml version="1.0" encoding="utf-8"?>
-<p:sld xmlns:a="http://schemas.openxmlformats.org/drawingml/2006/main" xmlns:r="http://schemas.openxmlformats.org/officeDocument/2006/relationships" xmlns:p="http://schemas.openxmlformats.org/presentationml/2006/main">
-  <p:cSld>
-    <p:spTree>
-      <p:nvGrpSpPr>
-        <p:cNvPr id="1" name=""/>
-        <p:cNvGrpSpPr/>
-        <p:nvPr/>
-      </p:nvGrpSpPr>
-      <p:grpSpPr>
-        <a:xfrm>
-          <a:off x="0" y="0"/>
-          <a:ext cx="0" cy="0"/>
-          <a:chOff x="0" y="0"/>
-          <a:chExt cx="0" cy="0"/>
-        </a:xfrm>
-      </p:grpSpPr>
-      <p:sp>
-        <p:nvSpPr>
-          <p:cNvPr id="2" name="Title 1">
-            <a:extLst>
-              <a:ext uri="{FF2B5EF4-FFF2-40B4-BE49-F238E27FC236}">
-                <a16:creationId xmlns:a16="http://schemas.microsoft.com/office/drawing/2014/main" id="{E8A3F80B-74A5-40D0-52E9-996CB5530F4D}"/>
-              </a:ext>
-            </a:extLst>
-          </p:cNvPr>
-          <p:cNvSpPr>
-            <a:spLocks noGrp="1"/>
-          </p:cNvSpPr>
-          <p:nvPr>
-            <p:ph type="title"/>
-          </p:nvPr>
-        </p:nvSpPr>
-        <p:spPr/>
-        <p:txBody>
-          <a:bodyPr/>
-          <a:lstStyle/>
-          <a:p>
-            <a:r>
-              <a:rPr lang="en-US" dirty="0"/>
-              <a:t>Inductive bias - continued</a:t>
-            </a:r>
-            <a:endParaRPr lang="en-SG" dirty="0"/>
-          </a:p>
-        </p:txBody>
-      </p:sp>
-      <mc:AlternateContent xmlns:mc="http://schemas.openxmlformats.org/markup-compatibility/2006" xmlns:a14="http://schemas.microsoft.com/office/drawing/2010/main">
-        <mc:Choice Requires="a14">
-          <p:sp>
-            <p:nvSpPr>
-              <p:cNvPr id="3" name="Content Placeholder 2">
-                <a:extLst>
-                  <a:ext uri="{FF2B5EF4-FFF2-40B4-BE49-F238E27FC236}">
-                    <a16:creationId xmlns:a16="http://schemas.microsoft.com/office/drawing/2014/main" id="{A35BD1A7-97DB-4793-15A1-B6EDA2CD59DA}"/>
-                  </a:ext>
-                </a:extLst>
-              </p:cNvPr>
-              <p:cNvSpPr>
-                <a:spLocks noGrp="1"/>
-              </p:cNvSpPr>
-              <p:nvPr>
-                <p:ph idx="1"/>
-              </p:nvPr>
-            </p:nvSpPr>
-            <p:spPr/>
-            <p:txBody>
-              <a:bodyPr/>
-              <a:lstStyle/>
-              <a:p>
-                <a:r>
-                  <a:rPr lang="en-US" dirty="0"/>
-                  <a:t>Symmetries and invariance</a:t>
-                </a:r>
-              </a:p>
-              <a:p>
-                <a:pPr lvl="1"/>
-                <a:r>
-                  <a:rPr lang="en-US" dirty="0"/>
-                  <a:t>Symmetries are described by a mathematical group.  A group is a set </a:t>
-                </a:r>
-                <a14:m>
-                  <m:oMath xmlns:m="http://schemas.openxmlformats.org/officeDocument/2006/math">
-                    <m:r>
-                      <a:rPr lang="en-US" b="0" i="1" smtClean="0">
-                        <a:latin typeface="Cambria Math" panose="02040503050406030204" pitchFamily="18" charset="0"/>
-                      </a:rPr>
-                      <m:t>𝐺</m:t>
-                    </m:r>
-                    <m:r>
-                      <a:rPr lang="en-US" b="0" i="1" smtClean="0">
-                        <a:latin typeface="Cambria Math" panose="02040503050406030204" pitchFamily="18" charset="0"/>
-                      </a:rPr>
-                      <m:t> </m:t>
-                    </m:r>
-                  </m:oMath>
-                </a14:m>
-                <a:r>
-                  <a:rPr lang="en-US" dirty="0"/>
-                  <a:t>of operations </a:t>
-                </a:r>
-                <a14:m>
-                  <m:oMath xmlns:m="http://schemas.openxmlformats.org/officeDocument/2006/math">
-                    <m:r>
-                      <a:rPr lang="en-US" b="0" i="1" smtClean="0">
-                        <a:latin typeface="Cambria Math" panose="02040503050406030204" pitchFamily="18" charset="0"/>
-                      </a:rPr>
-                      <m:t>𝐴</m:t>
-                    </m:r>
-                    <m:r>
-                      <a:rPr lang="en-US" b="0" i="1" smtClean="0">
-                        <a:latin typeface="Cambria Math" panose="02040503050406030204" pitchFamily="18" charset="0"/>
-                      </a:rPr>
-                      <m:t>, </m:t>
-                    </m:r>
-                    <m:r>
-                      <a:rPr lang="en-US" b="0" i="1" smtClean="0">
-                        <a:latin typeface="Cambria Math" panose="02040503050406030204" pitchFamily="18" charset="0"/>
-                      </a:rPr>
-                      <m:t>𝐵</m:t>
-                    </m:r>
-                    <m:r>
-                      <a:rPr lang="en-US" b="0" i="1" smtClean="0">
-                        <a:latin typeface="Cambria Math" panose="02040503050406030204" pitchFamily="18" charset="0"/>
-                      </a:rPr>
-                      <m:t>, </m:t>
-                    </m:r>
-                    <m:r>
-                      <a:rPr lang="en-US" b="0" i="1" smtClean="0">
-                        <a:latin typeface="Cambria Math" panose="02040503050406030204" pitchFamily="18" charset="0"/>
-                      </a:rPr>
-                      <m:t>𝐶</m:t>
-                    </m:r>
-                    <m:r>
-                      <a:rPr lang="en-US" b="0" i="1" smtClean="0">
-                        <a:latin typeface="Cambria Math" panose="02040503050406030204" pitchFamily="18" charset="0"/>
-                      </a:rPr>
-                      <m:t>, …</m:t>
-                    </m:r>
-                  </m:oMath>
-                </a14:m>
-                <a:r>
-                  <a:rPr lang="en-US" dirty="0"/>
-                  <a:t> which is closed under composition, </a:t>
-                </a:r>
-                <a14:m>
-                  <m:oMath xmlns:m="http://schemas.openxmlformats.org/officeDocument/2006/math">
-                    <m:r>
-                      <a:rPr lang="en-US" b="0" i="1" smtClean="0">
-                        <a:latin typeface="Cambria Math" panose="02040503050406030204" pitchFamily="18" charset="0"/>
-                      </a:rPr>
-                      <m:t>𝐴𝐵</m:t>
-                    </m:r>
-                    <m:r>
-                      <a:rPr lang="en-US" b="0" i="1" smtClean="0">
-                        <a:latin typeface="Cambria Math" panose="02040503050406030204" pitchFamily="18" charset="0"/>
-                      </a:rPr>
-                      <m:t>∈</m:t>
-                    </m:r>
-                    <m:r>
-                      <a:rPr lang="en-US" b="0" i="1" smtClean="0">
-                        <a:latin typeface="Cambria Math" panose="02040503050406030204" pitchFamily="18" charset="0"/>
-                      </a:rPr>
-                      <m:t>𝐺</m:t>
-                    </m:r>
-                  </m:oMath>
-                </a14:m>
-                <a:r>
-                  <a:rPr lang="en-US" dirty="0"/>
-                  <a:t> if </a:t>
-                </a:r>
-                <a14:m>
-                  <m:oMath xmlns:m="http://schemas.openxmlformats.org/officeDocument/2006/math">
-                    <m:r>
-                      <a:rPr lang="en-US" b="0" i="1" smtClean="0">
-                        <a:latin typeface="Cambria Math" panose="02040503050406030204" pitchFamily="18" charset="0"/>
-                      </a:rPr>
-                      <m:t>𝐴</m:t>
-                    </m:r>
-                    <m:r>
-                      <a:rPr lang="en-US" b="0" i="1" smtClean="0">
-                        <a:latin typeface="Cambria Math" panose="02040503050406030204" pitchFamily="18" charset="0"/>
-                      </a:rPr>
-                      <m:t>∈</m:t>
-                    </m:r>
-                    <m:r>
-                      <a:rPr lang="en-US" b="0" i="1" smtClean="0">
-                        <a:latin typeface="Cambria Math" panose="02040503050406030204" pitchFamily="18" charset="0"/>
-                      </a:rPr>
-                      <m:t>𝐺</m:t>
-                    </m:r>
-                  </m:oMath>
-                </a14:m>
-                <a:r>
-                  <a:rPr lang="en-US" dirty="0"/>
-                  <a:t> and </a:t>
-                </a:r>
-                <a14:m>
-                  <m:oMath xmlns:m="http://schemas.openxmlformats.org/officeDocument/2006/math">
-                    <m:r>
-                      <a:rPr lang="en-US" b="0" i="1" smtClean="0">
-                        <a:latin typeface="Cambria Math" panose="02040503050406030204" pitchFamily="18" charset="0"/>
-                      </a:rPr>
-                      <m:t>𝐵</m:t>
-                    </m:r>
-                    <m:r>
-                      <a:rPr lang="en-US" b="0" i="1" smtClean="0">
-                        <a:latin typeface="Cambria Math" panose="02040503050406030204" pitchFamily="18" charset="0"/>
-                      </a:rPr>
-                      <m:t>∈</m:t>
-                    </m:r>
-                    <m:r>
-                      <a:rPr lang="en-US" b="0" i="1" smtClean="0">
-                        <a:latin typeface="Cambria Math" panose="02040503050406030204" pitchFamily="18" charset="0"/>
-                      </a:rPr>
-                      <m:t>𝐺</m:t>
-                    </m:r>
-                  </m:oMath>
-                </a14:m>
-                <a:r>
-                  <a:rPr lang="en-US" dirty="0"/>
-                  <a:t>, associative </a:t>
-                </a:r>
-                <a14:m>
-                  <m:oMath xmlns:m="http://schemas.openxmlformats.org/officeDocument/2006/math">
-                    <m:d>
-                      <m:dPr>
-                        <m:ctrlPr>
-                          <a:rPr lang="en-US" b="0" i="1" smtClean="0">
-                            <a:latin typeface="Cambria Math" panose="02040503050406030204" pitchFamily="18" charset="0"/>
-                          </a:rPr>
-                        </m:ctrlPr>
-                      </m:dPr>
-                      <m:e>
-                        <m:r>
-                          <a:rPr lang="en-US" b="0" i="1" smtClean="0">
-                            <a:latin typeface="Cambria Math" panose="02040503050406030204" pitchFamily="18" charset="0"/>
-                          </a:rPr>
-                          <m:t>𝐴𝐵</m:t>
-                        </m:r>
-                      </m:e>
-                    </m:d>
-                    <m:r>
-                      <a:rPr lang="en-US" b="0" i="1" smtClean="0">
-                        <a:latin typeface="Cambria Math" panose="02040503050406030204" pitchFamily="18" charset="0"/>
-                      </a:rPr>
-                      <m:t>𝐶</m:t>
-                    </m:r>
-                    <m:r>
-                      <a:rPr lang="en-US" b="0" i="1" smtClean="0">
-                        <a:latin typeface="Cambria Math" panose="02040503050406030204" pitchFamily="18" charset="0"/>
-                      </a:rPr>
-                      <m:t>=</m:t>
-                    </m:r>
-                    <m:r>
-                      <a:rPr lang="en-US" b="0" i="1" smtClean="0">
-                        <a:latin typeface="Cambria Math" panose="02040503050406030204" pitchFamily="18" charset="0"/>
-                      </a:rPr>
-                      <m:t>𝐴</m:t>
-                    </m:r>
-                    <m:r>
-                      <a:rPr lang="en-US" b="0" i="1" smtClean="0">
-                        <a:latin typeface="Cambria Math" panose="02040503050406030204" pitchFamily="18" charset="0"/>
-                      </a:rPr>
-                      <m:t>(</m:t>
-                    </m:r>
-                    <m:r>
-                      <a:rPr lang="en-US" b="0" i="1" smtClean="0">
-                        <a:latin typeface="Cambria Math" panose="02040503050406030204" pitchFamily="18" charset="0"/>
-                      </a:rPr>
-                      <m:t>𝐵𝐶</m:t>
-                    </m:r>
-                    <m:r>
-                      <a:rPr lang="en-US" b="0" i="1" smtClean="0">
-                        <a:latin typeface="Cambria Math" panose="02040503050406030204" pitchFamily="18" charset="0"/>
-                      </a:rPr>
-                      <m:t>)</m:t>
-                    </m:r>
-                  </m:oMath>
-                </a14:m>
-                <a:r>
-                  <a:rPr lang="en-US" dirty="0"/>
-                  <a:t>, there exists an identity, </a:t>
-                </a:r>
-                <a14:m>
-                  <m:oMath xmlns:m="http://schemas.openxmlformats.org/officeDocument/2006/math">
-                    <m:r>
-                      <a:rPr lang="en-US" b="0" i="1" smtClean="0">
-                        <a:latin typeface="Cambria Math" panose="02040503050406030204" pitchFamily="18" charset="0"/>
-                      </a:rPr>
-                      <m:t>𝐴𝐼</m:t>
-                    </m:r>
-                    <m:r>
-                      <a:rPr lang="en-US" b="0" i="1" smtClean="0">
-                        <a:latin typeface="Cambria Math" panose="02040503050406030204" pitchFamily="18" charset="0"/>
-                      </a:rPr>
-                      <m:t>=</m:t>
-                    </m:r>
-                    <m:r>
-                      <a:rPr lang="en-US" b="0" i="1" smtClean="0">
-                        <a:latin typeface="Cambria Math" panose="02040503050406030204" pitchFamily="18" charset="0"/>
-                      </a:rPr>
-                      <m:t>𝐼𝐴</m:t>
-                    </m:r>
-                    <m:r>
-                      <a:rPr lang="en-US" b="0" i="1" smtClean="0">
-                        <a:latin typeface="Cambria Math" panose="02040503050406030204" pitchFamily="18" charset="0"/>
-                      </a:rPr>
-                      <m:t>=</m:t>
-                    </m:r>
-                    <m:r>
-                      <a:rPr lang="en-US" b="0" i="1" smtClean="0">
-                        <a:latin typeface="Cambria Math" panose="02040503050406030204" pitchFamily="18" charset="0"/>
-                      </a:rPr>
-                      <m:t>𝐴</m:t>
-                    </m:r>
-                  </m:oMath>
-                </a14:m>
-                <a:r>
-                  <a:rPr lang="en-US" dirty="0"/>
-                  <a:t> and inverse </a:t>
-                </a:r>
-                <a14:m>
-                  <m:oMath xmlns:m="http://schemas.openxmlformats.org/officeDocument/2006/math">
-                    <m:sSup>
-                      <m:sSupPr>
-                        <m:ctrlPr>
-                          <a:rPr lang="en-US" b="0" i="1" smtClean="0">
-                            <a:latin typeface="Cambria Math" panose="02040503050406030204" pitchFamily="18" charset="0"/>
-                          </a:rPr>
-                        </m:ctrlPr>
-                      </m:sSupPr>
-                      <m:e>
-                        <m:r>
-                          <a:rPr lang="en-US" b="0" i="1" smtClean="0">
-                            <a:latin typeface="Cambria Math" panose="02040503050406030204" pitchFamily="18" charset="0"/>
-                          </a:rPr>
-                          <m:t>𝐴</m:t>
-                        </m:r>
-                      </m:e>
-                      <m:sup>
-                        <m:r>
-                          <a:rPr lang="en-US" b="0" i="1" smtClean="0">
-                            <a:latin typeface="Cambria Math" panose="02040503050406030204" pitchFamily="18" charset="0"/>
-                          </a:rPr>
-                          <m:t>−1</m:t>
-                        </m:r>
-                      </m:sup>
-                    </m:sSup>
-                  </m:oMath>
-                </a14:m>
-                <a:r>
-                  <a:rPr lang="en-US" dirty="0"/>
-                  <a:t>.</a:t>
-                </a:r>
-              </a:p>
-              <a:p>
-                <a:pPr lvl="1"/>
-                <a:r>
-                  <a:rPr lang="en-US" dirty="0"/>
-                  <a:t>To handle symmetry we consider 1) pre-processing, 2) regularized error function, 3) data augmentation, 4) network architecture, e.g. CNN.</a:t>
-                </a:r>
-              </a:p>
-              <a:p>
-                <a:pPr lvl="1"/>
-                <a:endParaRPr lang="en-US" dirty="0"/>
-              </a:p>
-              <a:p>
-                <a:pPr lvl="1"/>
-                <a:endParaRPr lang="en-SG" dirty="0"/>
-              </a:p>
-            </p:txBody>
-          </p:sp>
-        </mc:Choice>
-        <mc:Fallback xmlns="">
-          <p:sp>
-            <p:nvSpPr>
-              <p:cNvPr id="3" name="Content Placeholder 2">
-                <a:extLst>
-                  <a:ext uri="{FF2B5EF4-FFF2-40B4-BE49-F238E27FC236}">
-                    <a16:creationId xmlns:a16="http://schemas.microsoft.com/office/drawing/2014/main" id="{A35BD1A7-97DB-4793-15A1-B6EDA2CD59DA}"/>
-                  </a:ext>
-                </a:extLst>
-              </p:cNvPr>
-              <p:cNvSpPr>
-                <a:spLocks noGrp="1" noRot="1" noChangeAspect="1" noMove="1" noResize="1" noEditPoints="1" noAdjustHandles="1" noChangeArrowheads="1" noChangeShapeType="1" noTextEdit="1"/>
-              </p:cNvSpPr>
-              <p:nvPr>
-                <p:ph idx="1"/>
-              </p:nvPr>
-            </p:nvSpPr>
-            <p:spPr>
-              <a:blipFill>
-                <a:blip r:embed="rId2"/>
-                <a:stretch>
-                  <a:fillRect l="-1391" t="-2381" r="-2009"/>
-                </a:stretch>
-              </a:blipFill>
-            </p:spPr>
-            <p:txBody>
-              <a:bodyPr/>
-              <a:lstStyle/>
-              <a:p>
-                <a:r>
-                  <a:rPr lang="en-SG">
-                    <a:noFill/>
-                  </a:rPr>
-                  <a:t> </a:t>
-                </a:r>
-              </a:p>
-            </p:txBody>
-          </p:sp>
-        </mc:Fallback>
-      </mc:AlternateContent>
-    </p:spTree>
-    <p:extLst>
-      <p:ext uri="{BB962C8B-B14F-4D97-AF65-F5344CB8AC3E}">
-        <p14:creationId xmlns:p14="http://schemas.microsoft.com/office/powerpoint/2010/main" val="843409894"/>
-      </p:ext>
-    </p:extLst>
-  </p:cSld>
-  <p:clrMapOvr>
-    <a:masterClrMapping/>
-  </p:clrMapOvr>
-</p:sld>
-</file>
-
-<file path=ppt/slides/slide5.xml><?xml version="1.0" encoding="utf-8"?>
-<p:sld xmlns:a="http://schemas.openxmlformats.org/drawingml/2006/main" xmlns:r="http://schemas.openxmlformats.org/officeDocument/2006/relationships" xmlns:p="http://schemas.openxmlformats.org/presentationml/2006/main">
-  <p:cSld>
-    <p:spTree>
-      <p:nvGrpSpPr>
-        <p:cNvPr id="1" name=""/>
-        <p:cNvGrpSpPr/>
-        <p:nvPr/>
-      </p:nvGrpSpPr>
-      <p:grpSpPr>
-        <a:xfrm>
-          <a:off x="0" y="0"/>
-          <a:ext cx="0" cy="0"/>
-          <a:chOff x="0" y="0"/>
-          <a:chExt cx="0" cy="0"/>
-        </a:xfrm>
-      </p:grpSpPr>
-      <p:sp>
-        <p:nvSpPr>
-          <p:cNvPr id="2" name="Title 1">
-            <a:extLst>
-              <a:ext uri="{FF2B5EF4-FFF2-40B4-BE49-F238E27FC236}">
-                <a16:creationId xmlns:a16="http://schemas.microsoft.com/office/drawing/2014/main" id="{03D5DD22-DBCA-2AB5-7BAF-9BAA5D86555F}"/>
-              </a:ext>
-            </a:extLst>
-          </p:cNvPr>
-          <p:cNvSpPr>
-            <a:spLocks noGrp="1"/>
-          </p:cNvSpPr>
-          <p:nvPr>
-            <p:ph type="title"/>
-          </p:nvPr>
-        </p:nvSpPr>
-        <p:spPr/>
-        <p:txBody>
-          <a:bodyPr/>
-          <a:lstStyle/>
-          <a:p>
-            <a:r>
-              <a:rPr lang="en-US" dirty="0"/>
-              <a:t>Equivariance</a:t>
-            </a:r>
-            <a:endParaRPr lang="en-SG" dirty="0"/>
-          </a:p>
-        </p:txBody>
-      </p:sp>
-      <mc:AlternateContent xmlns:mc="http://schemas.openxmlformats.org/markup-compatibility/2006" xmlns:a14="http://schemas.microsoft.com/office/drawing/2010/main">
-        <mc:Choice Requires="a14">
-          <p:sp>
-            <p:nvSpPr>
-              <p:cNvPr id="3" name="Content Placeholder 2">
-                <a:extLst>
-                  <a:ext uri="{FF2B5EF4-FFF2-40B4-BE49-F238E27FC236}">
-                    <a16:creationId xmlns:a16="http://schemas.microsoft.com/office/drawing/2014/main" id="{DF32209E-2960-DC50-255C-75E385D22FBC}"/>
-                  </a:ext>
-                </a:extLst>
-              </p:cNvPr>
-              <p:cNvSpPr>
-                <a:spLocks noGrp="1"/>
-              </p:cNvSpPr>
-              <p:nvPr>
-                <p:ph idx="1"/>
-              </p:nvPr>
-            </p:nvSpPr>
-            <p:spPr/>
-            <p:txBody>
-              <a:bodyPr>
-                <a:normAutofit fontScale="85000" lnSpcReduction="20000"/>
-              </a:bodyPr>
-              <a:lstStyle/>
-              <a:p>
-                <a:r>
-                  <a:rPr lang="en-US" dirty="0"/>
-                  <a:t>Two kinds of transformations, say, translation </a:t>
-                </a:r>
-                <a14:m>
-                  <m:oMath xmlns:m="http://schemas.openxmlformats.org/officeDocument/2006/math">
-                    <m:r>
-                      <a:rPr lang="en-US" b="0" i="1" smtClean="0">
-                        <a:latin typeface="Cambria Math" panose="02040503050406030204" pitchFamily="18" charset="0"/>
-                      </a:rPr>
-                      <m:t>𝑇</m:t>
-                    </m:r>
-                  </m:oMath>
-                </a14:m>
-                <a:r>
-                  <a:rPr lang="en-SG" dirty="0"/>
-                  <a:t> and segmentation </a:t>
-                </a:r>
-                <a14:m>
-                  <m:oMath xmlns:m="http://schemas.openxmlformats.org/officeDocument/2006/math">
-                    <m:r>
-                      <a:rPr lang="en-US" b="0" i="1" smtClean="0">
-                        <a:latin typeface="Cambria Math" panose="02040503050406030204" pitchFamily="18" charset="0"/>
-                      </a:rPr>
-                      <m:t>𝑆</m:t>
-                    </m:r>
-                  </m:oMath>
-                </a14:m>
-                <a:r>
-                  <a:rPr lang="en-SG" dirty="0"/>
-                  <a:t>.  Equivariance means</a:t>
-                </a:r>
-              </a:p>
-              <a:p>
-                <a14:m>
-                  <m:oMath xmlns:m="http://schemas.openxmlformats.org/officeDocument/2006/math">
-                    <m:r>
-                      <a:rPr lang="en-US" b="0" i="1" smtClean="0">
-                        <a:latin typeface="Cambria Math" panose="02040503050406030204" pitchFamily="18" charset="0"/>
-                      </a:rPr>
-                      <m:t>𝑆</m:t>
-                    </m:r>
-                    <m:d>
-                      <m:dPr>
-                        <m:ctrlPr>
-                          <a:rPr lang="en-US" b="0" i="1" smtClean="0">
-                            <a:latin typeface="Cambria Math" panose="02040503050406030204" pitchFamily="18" charset="0"/>
-                          </a:rPr>
-                        </m:ctrlPr>
-                      </m:dPr>
-                      <m:e>
-                        <m:r>
-                          <a:rPr lang="en-US" b="0" i="1" smtClean="0">
-                            <a:latin typeface="Cambria Math" panose="02040503050406030204" pitchFamily="18" charset="0"/>
-                          </a:rPr>
-                          <m:t>𝑇</m:t>
-                        </m:r>
-                        <m:d>
-                          <m:dPr>
-                            <m:ctrlPr>
-                              <a:rPr lang="en-US" b="0" i="1" smtClean="0">
-                                <a:latin typeface="Cambria Math" panose="02040503050406030204" pitchFamily="18" charset="0"/>
-                              </a:rPr>
-                            </m:ctrlPr>
-                          </m:dPr>
-                          <m:e>
-                            <m:r>
-                              <a:rPr lang="en-US" b="0" i="1" smtClean="0">
-                                <a:latin typeface="Cambria Math" panose="02040503050406030204" pitchFamily="18" charset="0"/>
-                              </a:rPr>
-                              <m:t>𝐼</m:t>
-                            </m:r>
-                          </m:e>
-                        </m:d>
-                      </m:e>
-                    </m:d>
-                    <m:r>
-                      <a:rPr lang="en-US" b="0" i="1" smtClean="0">
-                        <a:latin typeface="Cambria Math" panose="02040503050406030204" pitchFamily="18" charset="0"/>
-                      </a:rPr>
-                      <m:t>=</m:t>
-                    </m:r>
-                    <m:r>
-                      <a:rPr lang="en-US" b="0" i="1" smtClean="0">
-                        <a:latin typeface="Cambria Math" panose="02040503050406030204" pitchFamily="18" charset="0"/>
-                      </a:rPr>
-                      <m:t>𝑇</m:t>
-                    </m:r>
-                    <m:d>
-                      <m:dPr>
-                        <m:ctrlPr>
-                          <a:rPr lang="en-US" b="0" i="1" smtClean="0">
-                            <a:latin typeface="Cambria Math" panose="02040503050406030204" pitchFamily="18" charset="0"/>
-                          </a:rPr>
-                        </m:ctrlPr>
-                      </m:dPr>
-                      <m:e>
-                        <m:r>
-                          <a:rPr lang="en-US" b="0" i="1" smtClean="0">
-                            <a:latin typeface="Cambria Math" panose="02040503050406030204" pitchFamily="18" charset="0"/>
-                          </a:rPr>
-                          <m:t>𝑆</m:t>
-                        </m:r>
-                        <m:d>
-                          <m:dPr>
-                            <m:ctrlPr>
-                              <a:rPr lang="en-US" b="0" i="1" smtClean="0">
-                                <a:latin typeface="Cambria Math" panose="02040503050406030204" pitchFamily="18" charset="0"/>
-                              </a:rPr>
-                            </m:ctrlPr>
-                          </m:dPr>
-                          <m:e>
-                            <m:r>
-                              <a:rPr lang="en-US" b="0" i="1" smtClean="0">
-                                <a:latin typeface="Cambria Math" panose="02040503050406030204" pitchFamily="18" charset="0"/>
-                              </a:rPr>
-                              <m:t>𝐼</m:t>
-                            </m:r>
-                          </m:e>
-                        </m:d>
-                      </m:e>
-                    </m:d>
-                  </m:oMath>
-                </a14:m>
-                <a:endParaRPr lang="en-SG" dirty="0"/>
-              </a:p>
-              <a:p>
-                <a14:m>
-                  <m:oMath xmlns:m="http://schemas.openxmlformats.org/officeDocument/2006/math">
-                    <m:r>
-                      <a:rPr lang="en-US" b="0" i="1" smtClean="0">
-                        <a:latin typeface="Cambria Math" panose="02040503050406030204" pitchFamily="18" charset="0"/>
-                      </a:rPr>
-                      <m:t>𝐼</m:t>
-                    </m:r>
-                  </m:oMath>
-                </a14:m>
-                <a:r>
-                  <a:rPr lang="en-SG" dirty="0"/>
-                  <a:t>: input image</a:t>
-                </a:r>
-              </a:p>
-              <a:p>
-                <a:endParaRPr lang="en-SG" dirty="0"/>
-              </a:p>
-              <a:p>
-                <a:r>
-                  <a:rPr lang="en-SG" dirty="0"/>
-                  <a:t>If an image (a) is first</a:t>
-                </a:r>
-              </a:p>
-              <a:p>
-                <a:pPr marL="0" indent="0">
-                  <a:buNone/>
-                </a:pPr>
-                <a:r>
-                  <a:rPr lang="en-SG" dirty="0"/>
-                  <a:t>translated to give (b)</a:t>
-                </a:r>
-              </a:p>
-              <a:p>
-                <a:pPr marL="0" indent="0">
-                  <a:buNone/>
-                </a:pPr>
-                <a:r>
-                  <a:rPr lang="en-SG" dirty="0"/>
-                  <a:t>and then segmented to</a:t>
-                </a:r>
-              </a:p>
-              <a:p>
-                <a:pPr marL="0" indent="0">
-                  <a:buNone/>
-                </a:pPr>
-                <a:r>
-                  <a:rPr lang="en-SG" dirty="0"/>
-                  <a:t>give (d), the result is</a:t>
-                </a:r>
-              </a:p>
-              <a:p>
-                <a:pPr marL="0" indent="0">
-                  <a:buNone/>
-                </a:pPr>
-                <a:r>
-                  <a:rPr lang="en-SG" dirty="0"/>
-                  <a:t>the same if the order is</a:t>
-                </a:r>
-              </a:p>
-              <a:p>
-                <a:pPr marL="0" indent="0">
-                  <a:buNone/>
-                </a:pPr>
-                <a:r>
-                  <a:rPr lang="en-SG" dirty="0"/>
-                  <a:t>reversed.</a:t>
-                </a:r>
-              </a:p>
-              <a:p>
-                <a:pPr marL="0" indent="0">
-                  <a:buNone/>
-                </a:pPr>
-                <a:endParaRPr lang="en-SG" dirty="0"/>
-              </a:p>
-            </p:txBody>
-          </p:sp>
-        </mc:Choice>
-        <mc:Fallback xmlns="">
-          <p:sp>
-            <p:nvSpPr>
-              <p:cNvPr id="3" name="Content Placeholder 2">
-                <a:extLst>
-                  <a:ext uri="{FF2B5EF4-FFF2-40B4-BE49-F238E27FC236}">
-                    <a16:creationId xmlns:a16="http://schemas.microsoft.com/office/drawing/2014/main" id="{DF32209E-2960-DC50-255C-75E385D22FBC}"/>
-                  </a:ext>
-                </a:extLst>
-              </p:cNvPr>
-              <p:cNvSpPr>
-                <a:spLocks noGrp="1" noRot="1" noChangeAspect="1" noMove="1" noResize="1" noEditPoints="1" noAdjustHandles="1" noChangeArrowheads="1" noChangeShapeType="1" noTextEdit="1"/>
-              </p:cNvSpPr>
-              <p:nvPr>
-                <p:ph idx="1"/>
-              </p:nvPr>
-            </p:nvSpPr>
-            <p:spPr>
-              <a:blipFill>
-                <a:blip r:embed="rId2"/>
-                <a:stretch>
-                  <a:fillRect l="-1159" t="-3641"/>
-                </a:stretch>
-              </a:blipFill>
-            </p:spPr>
-            <p:txBody>
-              <a:bodyPr/>
-              <a:lstStyle/>
-              <a:p>
-                <a:r>
-                  <a:rPr lang="en-SG">
-                    <a:noFill/>
-                  </a:rPr>
-                  <a:t> </a:t>
-                </a:r>
-              </a:p>
-            </p:txBody>
-          </p:sp>
-        </mc:Fallback>
-      </mc:AlternateContent>
-      <p:pic>
-        <p:nvPicPr>
-          <p:cNvPr id="5" name="Picture 4">
-            <a:extLst>
-              <a:ext uri="{FF2B5EF4-FFF2-40B4-BE49-F238E27FC236}">
-                <a16:creationId xmlns:a16="http://schemas.microsoft.com/office/drawing/2014/main" id="{5EC3AF8E-6A62-E6D3-4AF2-696D14CAAE37}"/>
-              </a:ext>
-            </a:extLst>
-          </p:cNvPr>
-          <p:cNvPicPr>
-            <a:picLocks noChangeAspect="1"/>
-          </p:cNvPicPr>
-          <p:nvPr/>
-        </p:nvPicPr>
-        <p:blipFill>
-          <a:blip r:embed="rId3"/>
-          <a:stretch>
-            <a:fillRect/>
-          </a:stretch>
-        </p:blipFill>
-        <p:spPr>
-          <a:xfrm>
-            <a:off x="5221846" y="2835274"/>
-            <a:ext cx="3404729" cy="3657600"/>
-          </a:xfrm>
-          <a:prstGeom prst="rect">
-            <a:avLst/>
-          </a:prstGeom>
-        </p:spPr>
-      </p:pic>
-    </p:spTree>
-    <p:extLst>
-      <p:ext uri="{BB962C8B-B14F-4D97-AF65-F5344CB8AC3E}">
-        <p14:creationId xmlns:p14="http://schemas.microsoft.com/office/powerpoint/2010/main" val="590719091"/>
-      </p:ext>
-    </p:extLst>
-  </p:cSld>
-  <p:clrMapOvr>
-    <a:masterClrMapping/>
-  </p:clrMapOvr>
-</p:sld>
-</file>
-
-<file path=ppt/slides/slide6.xml><?xml version="1.0" encoding="utf-8"?>
-<p:sld xmlns:a="http://schemas.openxmlformats.org/drawingml/2006/main" xmlns:r="http://schemas.openxmlformats.org/officeDocument/2006/relationships" xmlns:p="http://schemas.openxmlformats.org/presentationml/2006/main">
-  <p:cSld>
-    <p:spTree>
-      <p:nvGrpSpPr>
-        <p:cNvPr id="1" name=""/>
-        <p:cNvGrpSpPr/>
-        <p:nvPr/>
-      </p:nvGrpSpPr>
-      <p:grpSpPr>
-        <a:xfrm>
-          <a:off x="0" y="0"/>
-          <a:ext cx="0" cy="0"/>
-          <a:chOff x="0" y="0"/>
-          <a:chExt cx="0" cy="0"/>
-        </a:xfrm>
-      </p:grpSpPr>
-      <p:sp>
-        <p:nvSpPr>
-          <p:cNvPr id="2" name="Title 1">
-            <a:extLst>
-              <a:ext uri="{FF2B5EF4-FFF2-40B4-BE49-F238E27FC236}">
-                <a16:creationId xmlns:a16="http://schemas.microsoft.com/office/drawing/2014/main" id="{D0215E0B-5C0E-29FC-3D1A-245E5D71804D}"/>
-              </a:ext>
-            </a:extLst>
-          </p:cNvPr>
-          <p:cNvSpPr>
-            <a:spLocks noGrp="1"/>
-          </p:cNvSpPr>
-          <p:nvPr>
-            <p:ph type="title"/>
-          </p:nvPr>
-        </p:nvSpPr>
-        <p:spPr/>
-        <p:txBody>
-          <a:bodyPr/>
-          <a:lstStyle/>
-          <a:p>
-            <a:r>
-              <a:rPr lang="en-US" dirty="0"/>
-              <a:t>Regularization</a:t>
-            </a:r>
-            <a:endParaRPr lang="en-SG" dirty="0"/>
-          </a:p>
-        </p:txBody>
-      </p:sp>
-      <mc:AlternateContent xmlns:mc="http://schemas.openxmlformats.org/markup-compatibility/2006" xmlns:a14="http://schemas.microsoft.com/office/drawing/2010/main">
-        <mc:Choice Requires="a14">
-          <p:sp>
-            <p:nvSpPr>
-              <p:cNvPr id="3" name="Content Placeholder 2">
-                <a:extLst>
-                  <a:ext uri="{FF2B5EF4-FFF2-40B4-BE49-F238E27FC236}">
-                    <a16:creationId xmlns:a16="http://schemas.microsoft.com/office/drawing/2014/main" id="{475794ED-3E24-36F7-0208-95B5F1C4FB77}"/>
-                  </a:ext>
-                </a:extLst>
-              </p:cNvPr>
-              <p:cNvSpPr>
-                <a:spLocks noGrp="1"/>
-              </p:cNvSpPr>
-              <p:nvPr>
-                <p:ph idx="1"/>
-              </p:nvPr>
-            </p:nvSpPr>
-            <p:spPr/>
-            <p:txBody>
-              <a:bodyPr/>
-              <a:lstStyle/>
-              <a:p>
-                <a:r>
-                  <a:rPr lang="en-US" dirty="0"/>
-                  <a:t>Methods for better generalization and reducing overfitting</a:t>
-                </a:r>
-              </a:p>
-              <a:p>
-                <a:endParaRPr lang="en-US" dirty="0"/>
-              </a:p>
-              <a:p>
-                <a:r>
-                  <a:rPr lang="en-US" dirty="0"/>
-                  <a:t>Make an ill-posed problem well behaved (e.g. more fitting parameters than data)</a:t>
-                </a:r>
-              </a:p>
-              <a:p>
-                <a:endParaRPr lang="en-US" dirty="0"/>
-              </a:p>
-              <a:p>
-                <a:r>
-                  <a:rPr lang="en-US" dirty="0"/>
-                  <a:t>The most basic method, weight decay</a:t>
-                </a:r>
-              </a:p>
-              <a:p>
-                <a:pPr marL="0" indent="0">
-                  <a:buNone/>
-                </a:pPr>
-                <a14:m>
-                  <m:oMathPara xmlns:m="http://schemas.openxmlformats.org/officeDocument/2006/math">
-                    <m:oMathParaPr>
-                      <m:jc m:val="centerGroup"/>
-                    </m:oMathParaPr>
-                    <m:oMath xmlns:m="http://schemas.openxmlformats.org/officeDocument/2006/math">
-                      <m:r>
-                        <a:rPr lang="en-US" b="0" i="1" smtClean="0">
-                          <a:latin typeface="Cambria Math" panose="02040503050406030204" pitchFamily="18" charset="0"/>
-                        </a:rPr>
-                        <m:t> </m:t>
-                      </m:r>
-                      <m:acc>
-                        <m:accPr>
-                          <m:chr m:val="̃"/>
-                          <m:ctrlPr>
-                            <a:rPr lang="en-US" b="0" i="1" smtClean="0">
-                              <a:latin typeface="Cambria Math" panose="02040503050406030204" pitchFamily="18" charset="0"/>
-                            </a:rPr>
-                          </m:ctrlPr>
-                        </m:accPr>
-                        <m:e>
-                          <m:r>
-                            <a:rPr lang="en-US" b="0" i="1" smtClean="0">
-                              <a:latin typeface="Cambria Math" panose="02040503050406030204" pitchFamily="18" charset="0"/>
-                            </a:rPr>
-                            <m:t>𝐸</m:t>
-                          </m:r>
-                        </m:e>
-                      </m:acc>
-                      <m:d>
-                        <m:dPr>
-                          <m:ctrlPr>
-                            <a:rPr lang="en-US" b="0" i="1" smtClean="0">
-                              <a:latin typeface="Cambria Math" panose="02040503050406030204" pitchFamily="18" charset="0"/>
-                            </a:rPr>
-                          </m:ctrlPr>
-                        </m:dPr>
-                        <m:e>
-                          <m:r>
-                            <a:rPr lang="en-US" b="1" i="1" smtClean="0">
-                              <a:latin typeface="Cambria Math" panose="02040503050406030204" pitchFamily="18" charset="0"/>
-                            </a:rPr>
-                            <m:t>𝒘</m:t>
-                          </m:r>
-                        </m:e>
-                      </m:d>
-                      <m:r>
-                        <a:rPr lang="en-US" b="0" i="1" smtClean="0">
-                          <a:latin typeface="Cambria Math" panose="02040503050406030204" pitchFamily="18" charset="0"/>
-                        </a:rPr>
-                        <m:t>=</m:t>
-                      </m:r>
-                      <m:r>
-                        <a:rPr lang="en-US" b="0" i="1" smtClean="0">
-                          <a:latin typeface="Cambria Math" panose="02040503050406030204" pitchFamily="18" charset="0"/>
-                        </a:rPr>
-                        <m:t>𝐸</m:t>
-                      </m:r>
-                      <m:d>
-                        <m:dPr>
-                          <m:ctrlPr>
-                            <a:rPr lang="en-US" b="0" i="1" smtClean="0">
-                              <a:latin typeface="Cambria Math" panose="02040503050406030204" pitchFamily="18" charset="0"/>
-                            </a:rPr>
-                          </m:ctrlPr>
-                        </m:dPr>
-                        <m:e>
-                          <m:r>
-                            <a:rPr lang="en-US" b="1" i="1" smtClean="0">
-                              <a:latin typeface="Cambria Math" panose="02040503050406030204" pitchFamily="18" charset="0"/>
-                            </a:rPr>
-                            <m:t>𝒘</m:t>
-                          </m:r>
-                        </m:e>
-                      </m:d>
-                      <m:r>
-                        <a:rPr lang="en-US" b="0" i="1" smtClean="0">
-                          <a:latin typeface="Cambria Math" panose="02040503050406030204" pitchFamily="18" charset="0"/>
-                        </a:rPr>
-                        <m:t>+</m:t>
-                      </m:r>
-                      <m:f>
-                        <m:fPr>
-                          <m:ctrlPr>
-                            <a:rPr lang="en-US" b="0" i="1" smtClean="0">
-                              <a:latin typeface="Cambria Math" panose="02040503050406030204" pitchFamily="18" charset="0"/>
-                            </a:rPr>
-                          </m:ctrlPr>
-                        </m:fPr>
-                        <m:num>
-                          <m:r>
-                            <a:rPr lang="en-US" b="0" i="1" smtClean="0">
-                              <a:latin typeface="Cambria Math" panose="02040503050406030204" pitchFamily="18" charset="0"/>
-                            </a:rPr>
-                            <m:t>𝜆</m:t>
-                          </m:r>
-                        </m:num>
-                        <m:den>
-                          <m:r>
-                            <a:rPr lang="en-US" b="0" i="1" smtClean="0">
-                              <a:latin typeface="Cambria Math" panose="02040503050406030204" pitchFamily="18" charset="0"/>
-                            </a:rPr>
-                            <m:t>2</m:t>
-                          </m:r>
-                        </m:den>
-                      </m:f>
-                      <m:r>
-                        <a:rPr lang="en-US" b="0" i="1" smtClean="0">
-                          <a:latin typeface="Cambria Math" panose="02040503050406030204" pitchFamily="18" charset="0"/>
-                        </a:rPr>
-                        <m:t> </m:t>
-                      </m:r>
-                      <m:sSup>
-                        <m:sSupPr>
-                          <m:ctrlPr>
-                            <a:rPr lang="en-US" b="0" i="1" smtClean="0">
-                              <a:latin typeface="Cambria Math" panose="02040503050406030204" pitchFamily="18" charset="0"/>
-                            </a:rPr>
-                          </m:ctrlPr>
-                        </m:sSupPr>
-                        <m:e>
-                          <m:r>
-                            <a:rPr lang="en-US" b="1" i="1" smtClean="0">
-                              <a:latin typeface="Cambria Math" panose="02040503050406030204" pitchFamily="18" charset="0"/>
-                            </a:rPr>
-                            <m:t>𝒘</m:t>
-                          </m:r>
-                        </m:e>
-                        <m:sup>
-                          <m:r>
-                            <a:rPr lang="en-US" b="0" i="1" smtClean="0">
-                              <a:latin typeface="Cambria Math" panose="02040503050406030204" pitchFamily="18" charset="0"/>
-                            </a:rPr>
-                            <m:t>𝑇</m:t>
-                          </m:r>
-                        </m:sup>
-                      </m:sSup>
-                      <m:r>
-                        <a:rPr lang="en-US" b="1" i="1" smtClean="0">
-                          <a:latin typeface="Cambria Math" panose="02040503050406030204" pitchFamily="18" charset="0"/>
-                        </a:rPr>
-                        <m:t>𝒘</m:t>
-                      </m:r>
-                    </m:oMath>
-                  </m:oMathPara>
-                </a14:m>
-                <a:endParaRPr lang="en-US" b="1" dirty="0"/>
-              </a:p>
-            </p:txBody>
-          </p:sp>
-        </mc:Choice>
-        <mc:Fallback xmlns="">
-          <p:sp>
-            <p:nvSpPr>
-              <p:cNvPr id="3" name="Content Placeholder 2">
-                <a:extLst>
-                  <a:ext uri="{FF2B5EF4-FFF2-40B4-BE49-F238E27FC236}">
-                    <a16:creationId xmlns:a16="http://schemas.microsoft.com/office/drawing/2014/main" id="{475794ED-3E24-36F7-0208-95B5F1C4FB77}"/>
-                  </a:ext>
-                </a:extLst>
-              </p:cNvPr>
-              <p:cNvSpPr>
-                <a:spLocks noGrp="1" noRot="1" noChangeAspect="1" noMove="1" noResize="1" noEditPoints="1" noAdjustHandles="1" noChangeArrowheads="1" noChangeShapeType="1" noTextEdit="1"/>
-              </p:cNvSpPr>
-              <p:nvPr>
-                <p:ph idx="1"/>
-              </p:nvPr>
-            </p:nvSpPr>
-            <p:spPr>
-              <a:blipFill>
-                <a:blip r:embed="rId3"/>
-                <a:stretch>
-                  <a:fillRect l="-1391" t="-2381"/>
-                </a:stretch>
-              </a:blipFill>
-            </p:spPr>
-            <p:txBody>
-              <a:bodyPr/>
-              <a:lstStyle/>
-              <a:p>
-                <a:r>
-                  <a:rPr lang="en-SG">
-                    <a:noFill/>
-                  </a:rPr>
-                  <a:t> </a:t>
-                </a:r>
-              </a:p>
-            </p:txBody>
-          </p:sp>
-        </mc:Fallback>
-      </mc:AlternateContent>
-    </p:spTree>
-    <p:extLst>
-      <p:ext uri="{BB962C8B-B14F-4D97-AF65-F5344CB8AC3E}">
-        <p14:creationId xmlns:p14="http://schemas.microsoft.com/office/powerpoint/2010/main" val="1530894939"/>
-      </p:ext>
-    </p:extLst>
-  </p:cSld>
-  <p:clrMapOvr>
-    <a:masterClrMapping/>
-  </p:clrMapOvr>
-</p:sld>
-</file>
-
-<file path=ppt/slides/slide7.xml><?xml version="1.0" encoding="utf-8"?>
 <p:sld xmlns:a="http://schemas.openxmlformats.org/drawingml/2006/main" xmlns:r="http://schemas.openxmlformats.org/officeDocument/2006/relationships" xmlns:p="http://schemas.openxmlformats.org/presentationml/2006/main">
   <p:cSld>
     <p:spTree>
@@ -14023,7 +13042,1204 @@
     </p:spTree>
     <p:extLst>
       <p:ext uri="{BB962C8B-B14F-4D97-AF65-F5344CB8AC3E}">
-        <p14:creationId xmlns:p14="http://schemas.microsoft.com/office/powerpoint/2010/main" val="881298221"/>
+        <p14:creationId xmlns:p14="http://schemas.microsoft.com/office/powerpoint/2010/main" val="576269064"/>
+      </p:ext>
+    </p:extLst>
+  </p:cSld>
+  <p:clrMapOvr>
+    <a:masterClrMapping/>
+  </p:clrMapOvr>
+</p:sld>
+</file>
+
+<file path=ppt/slides/slide4.xml><?xml version="1.0" encoding="utf-8"?>
+<p:sld xmlns:a="http://schemas.openxmlformats.org/drawingml/2006/main" xmlns:r="http://schemas.openxmlformats.org/officeDocument/2006/relationships" xmlns:p="http://schemas.openxmlformats.org/presentationml/2006/main">
+  <p:cSld>
+    <p:spTree>
+      <p:nvGrpSpPr>
+        <p:cNvPr id="1" name=""/>
+        <p:cNvGrpSpPr/>
+        <p:nvPr/>
+      </p:nvGrpSpPr>
+      <p:grpSpPr>
+        <a:xfrm>
+          <a:off x="0" y="0"/>
+          <a:ext cx="0" cy="0"/>
+          <a:chOff x="0" y="0"/>
+          <a:chExt cx="0" cy="0"/>
+        </a:xfrm>
+      </p:grpSpPr>
+      <p:sp>
+        <p:nvSpPr>
+          <p:cNvPr id="2" name="Title 1">
+            <a:extLst>
+              <a:ext uri="{FF2B5EF4-FFF2-40B4-BE49-F238E27FC236}">
+                <a16:creationId xmlns:a16="http://schemas.microsoft.com/office/drawing/2014/main" id="{69CC3191-D0C5-DBEE-B54D-A72D173E1376}"/>
+              </a:ext>
+            </a:extLst>
+          </p:cNvPr>
+          <p:cNvSpPr>
+            <a:spLocks noGrp="1"/>
+          </p:cNvSpPr>
+          <p:nvPr>
+            <p:ph type="title"/>
+          </p:nvPr>
+        </p:nvSpPr>
+        <p:spPr/>
+        <p:txBody>
+          <a:bodyPr/>
+          <a:lstStyle/>
+          <a:p>
+            <a:r>
+              <a:rPr lang="en-US" dirty="0"/>
+              <a:t>Inductive bias</a:t>
+            </a:r>
+            <a:endParaRPr lang="en-SG" dirty="0"/>
+          </a:p>
+        </p:txBody>
+      </p:sp>
+      <p:sp>
+        <p:nvSpPr>
+          <p:cNvPr id="3" name="Content Placeholder 2">
+            <a:extLst>
+              <a:ext uri="{FF2B5EF4-FFF2-40B4-BE49-F238E27FC236}">
+                <a16:creationId xmlns:a16="http://schemas.microsoft.com/office/drawing/2014/main" id="{3AD0DA7D-BE99-57F0-F543-E534995716AF}"/>
+              </a:ext>
+            </a:extLst>
+          </p:cNvPr>
+          <p:cNvSpPr>
+            <a:spLocks noGrp="1"/>
+          </p:cNvSpPr>
+          <p:nvPr>
+            <p:ph idx="1"/>
+          </p:nvPr>
+        </p:nvSpPr>
+        <p:spPr/>
+        <p:txBody>
+          <a:bodyPr>
+            <a:normAutofit/>
+          </a:bodyPr>
+          <a:lstStyle/>
+          <a:p>
+            <a:r>
+              <a:rPr lang="en-US" dirty="0"/>
+              <a:t>A set of assumptions about the data in order to predict well in machine learning, e.g., smoothness of the data, certain symmetries, etc.</a:t>
+            </a:r>
+          </a:p>
+          <a:p>
+            <a:pPr lvl="1"/>
+            <a:endParaRPr lang="en-US" dirty="0"/>
+          </a:p>
+          <a:p>
+            <a:pPr lvl="1"/>
+            <a:r>
+              <a:rPr lang="en-US" dirty="0"/>
+              <a:t>Inverse problem – infer a function or probability distribution from data</a:t>
+            </a:r>
+          </a:p>
+          <a:p>
+            <a:pPr lvl="1"/>
+            <a:r>
+              <a:rPr lang="en-US" dirty="0"/>
+              <a:t>No free lunch theorem –  averaged uniformly over all possible problems, all learning algorithms perform equally well</a:t>
+            </a:r>
+          </a:p>
+          <a:p>
+            <a:pPr lvl="1"/>
+            <a:endParaRPr lang="en-US" dirty="0"/>
+          </a:p>
+        </p:txBody>
+      </p:sp>
+    </p:spTree>
+    <p:extLst>
+      <p:ext uri="{BB962C8B-B14F-4D97-AF65-F5344CB8AC3E}">
+        <p14:creationId xmlns:p14="http://schemas.microsoft.com/office/powerpoint/2010/main" val="708994579"/>
+      </p:ext>
+    </p:extLst>
+  </p:cSld>
+  <p:clrMapOvr>
+    <a:masterClrMapping/>
+  </p:clrMapOvr>
+</p:sld>
+</file>
+
+<file path=ppt/slides/slide5.xml><?xml version="1.0" encoding="utf-8"?>
+<p:sld xmlns:a="http://schemas.openxmlformats.org/drawingml/2006/main" xmlns:r="http://schemas.openxmlformats.org/officeDocument/2006/relationships" xmlns:p="http://schemas.openxmlformats.org/presentationml/2006/main">
+  <p:cSld>
+    <p:spTree>
+      <p:nvGrpSpPr>
+        <p:cNvPr id="1" name=""/>
+        <p:cNvGrpSpPr/>
+        <p:nvPr/>
+      </p:nvGrpSpPr>
+      <p:grpSpPr>
+        <a:xfrm>
+          <a:off x="0" y="0"/>
+          <a:ext cx="0" cy="0"/>
+          <a:chOff x="0" y="0"/>
+          <a:chExt cx="0" cy="0"/>
+        </a:xfrm>
+      </p:grpSpPr>
+      <p:sp>
+        <p:nvSpPr>
+          <p:cNvPr id="2" name="Title 1">
+            <a:extLst>
+              <a:ext uri="{FF2B5EF4-FFF2-40B4-BE49-F238E27FC236}">
+                <a16:creationId xmlns:a16="http://schemas.microsoft.com/office/drawing/2014/main" id="{E8A3F80B-74A5-40D0-52E9-996CB5530F4D}"/>
+              </a:ext>
+            </a:extLst>
+          </p:cNvPr>
+          <p:cNvSpPr>
+            <a:spLocks noGrp="1"/>
+          </p:cNvSpPr>
+          <p:nvPr>
+            <p:ph type="title"/>
+          </p:nvPr>
+        </p:nvSpPr>
+        <p:spPr/>
+        <p:txBody>
+          <a:bodyPr/>
+          <a:lstStyle/>
+          <a:p>
+            <a:r>
+              <a:rPr lang="en-US" dirty="0"/>
+              <a:t>Inductive bias - continued</a:t>
+            </a:r>
+            <a:endParaRPr lang="en-SG" dirty="0"/>
+          </a:p>
+        </p:txBody>
+      </p:sp>
+      <mc:AlternateContent xmlns:mc="http://schemas.openxmlformats.org/markup-compatibility/2006" xmlns:a14="http://schemas.microsoft.com/office/drawing/2010/main">
+        <mc:Choice Requires="a14">
+          <p:sp>
+            <p:nvSpPr>
+              <p:cNvPr id="3" name="Content Placeholder 2">
+                <a:extLst>
+                  <a:ext uri="{FF2B5EF4-FFF2-40B4-BE49-F238E27FC236}">
+                    <a16:creationId xmlns:a16="http://schemas.microsoft.com/office/drawing/2014/main" id="{A35BD1A7-97DB-4793-15A1-B6EDA2CD59DA}"/>
+                  </a:ext>
+                </a:extLst>
+              </p:cNvPr>
+              <p:cNvSpPr>
+                <a:spLocks noGrp="1"/>
+              </p:cNvSpPr>
+              <p:nvPr>
+                <p:ph idx="1"/>
+              </p:nvPr>
+            </p:nvSpPr>
+            <p:spPr/>
+            <p:txBody>
+              <a:bodyPr/>
+              <a:lstStyle/>
+              <a:p>
+                <a:r>
+                  <a:rPr lang="en-US" dirty="0"/>
+                  <a:t>Symmetries and invariance</a:t>
+                </a:r>
+              </a:p>
+              <a:p>
+                <a:pPr lvl="1"/>
+                <a:r>
+                  <a:rPr lang="en-US" dirty="0"/>
+                  <a:t>Symmetries are described by mathematical groups.  A group is a set </a:t>
+                </a:r>
+                <a14:m>
+                  <m:oMath xmlns:m="http://schemas.openxmlformats.org/officeDocument/2006/math">
+                    <m:r>
+                      <a:rPr lang="en-US" b="0" i="1" smtClean="0">
+                        <a:latin typeface="Cambria Math" panose="02040503050406030204" pitchFamily="18" charset="0"/>
+                      </a:rPr>
+                      <m:t>𝐺</m:t>
+                    </m:r>
+                    <m:r>
+                      <a:rPr lang="en-US" b="0" i="1" smtClean="0">
+                        <a:latin typeface="Cambria Math" panose="02040503050406030204" pitchFamily="18" charset="0"/>
+                      </a:rPr>
+                      <m:t> </m:t>
+                    </m:r>
+                  </m:oMath>
+                </a14:m>
+                <a:r>
+                  <a:rPr lang="en-US" dirty="0"/>
+                  <a:t>of operations </a:t>
+                </a:r>
+                <a14:m>
+                  <m:oMath xmlns:m="http://schemas.openxmlformats.org/officeDocument/2006/math">
+                    <m:r>
+                      <a:rPr lang="en-US" b="0" i="1" smtClean="0">
+                        <a:latin typeface="Cambria Math" panose="02040503050406030204" pitchFamily="18" charset="0"/>
+                      </a:rPr>
+                      <m:t>𝐴</m:t>
+                    </m:r>
+                    <m:r>
+                      <a:rPr lang="en-US" b="0" i="1" smtClean="0">
+                        <a:latin typeface="Cambria Math" panose="02040503050406030204" pitchFamily="18" charset="0"/>
+                      </a:rPr>
+                      <m:t>, </m:t>
+                    </m:r>
+                    <m:r>
+                      <a:rPr lang="en-US" b="0" i="1" smtClean="0">
+                        <a:latin typeface="Cambria Math" panose="02040503050406030204" pitchFamily="18" charset="0"/>
+                      </a:rPr>
+                      <m:t>𝐵</m:t>
+                    </m:r>
+                    <m:r>
+                      <a:rPr lang="en-US" b="0" i="1" smtClean="0">
+                        <a:latin typeface="Cambria Math" panose="02040503050406030204" pitchFamily="18" charset="0"/>
+                      </a:rPr>
+                      <m:t>, </m:t>
+                    </m:r>
+                    <m:r>
+                      <a:rPr lang="en-US" b="0" i="1" smtClean="0">
+                        <a:latin typeface="Cambria Math" panose="02040503050406030204" pitchFamily="18" charset="0"/>
+                      </a:rPr>
+                      <m:t>𝐶</m:t>
+                    </m:r>
+                    <m:r>
+                      <a:rPr lang="en-US" b="0" i="1" smtClean="0">
+                        <a:latin typeface="Cambria Math" panose="02040503050406030204" pitchFamily="18" charset="0"/>
+                      </a:rPr>
+                      <m:t>, …</m:t>
+                    </m:r>
+                  </m:oMath>
+                </a14:m>
+                <a:r>
+                  <a:rPr lang="en-US" dirty="0"/>
+                  <a:t> which is closed under composition, </a:t>
+                </a:r>
+                <a14:m>
+                  <m:oMath xmlns:m="http://schemas.openxmlformats.org/officeDocument/2006/math">
+                    <m:r>
+                      <a:rPr lang="en-US" b="0" i="1" smtClean="0">
+                        <a:latin typeface="Cambria Math" panose="02040503050406030204" pitchFamily="18" charset="0"/>
+                      </a:rPr>
+                      <m:t>𝐴𝐵</m:t>
+                    </m:r>
+                    <m:r>
+                      <a:rPr lang="en-US" b="0" i="1" smtClean="0">
+                        <a:latin typeface="Cambria Math" panose="02040503050406030204" pitchFamily="18" charset="0"/>
+                      </a:rPr>
+                      <m:t>∈</m:t>
+                    </m:r>
+                    <m:r>
+                      <a:rPr lang="en-US" b="0" i="1" smtClean="0">
+                        <a:latin typeface="Cambria Math" panose="02040503050406030204" pitchFamily="18" charset="0"/>
+                      </a:rPr>
+                      <m:t>𝐺</m:t>
+                    </m:r>
+                  </m:oMath>
+                </a14:m>
+                <a:r>
+                  <a:rPr lang="en-US" dirty="0"/>
+                  <a:t> if </a:t>
+                </a:r>
+                <a14:m>
+                  <m:oMath xmlns:m="http://schemas.openxmlformats.org/officeDocument/2006/math">
+                    <m:r>
+                      <a:rPr lang="en-US" b="0" i="1" smtClean="0">
+                        <a:latin typeface="Cambria Math" panose="02040503050406030204" pitchFamily="18" charset="0"/>
+                      </a:rPr>
+                      <m:t>𝐴</m:t>
+                    </m:r>
+                    <m:r>
+                      <a:rPr lang="en-US" b="0" i="1" smtClean="0">
+                        <a:latin typeface="Cambria Math" panose="02040503050406030204" pitchFamily="18" charset="0"/>
+                      </a:rPr>
+                      <m:t>∈</m:t>
+                    </m:r>
+                    <m:r>
+                      <a:rPr lang="en-US" b="0" i="1" smtClean="0">
+                        <a:latin typeface="Cambria Math" panose="02040503050406030204" pitchFamily="18" charset="0"/>
+                      </a:rPr>
+                      <m:t>𝐺</m:t>
+                    </m:r>
+                  </m:oMath>
+                </a14:m>
+                <a:r>
+                  <a:rPr lang="en-US" dirty="0"/>
+                  <a:t> and </a:t>
+                </a:r>
+                <a14:m>
+                  <m:oMath xmlns:m="http://schemas.openxmlformats.org/officeDocument/2006/math">
+                    <m:r>
+                      <a:rPr lang="en-US" b="0" i="1" smtClean="0">
+                        <a:latin typeface="Cambria Math" panose="02040503050406030204" pitchFamily="18" charset="0"/>
+                      </a:rPr>
+                      <m:t>𝐵</m:t>
+                    </m:r>
+                    <m:r>
+                      <a:rPr lang="en-US" b="0" i="1" smtClean="0">
+                        <a:latin typeface="Cambria Math" panose="02040503050406030204" pitchFamily="18" charset="0"/>
+                      </a:rPr>
+                      <m:t>∈</m:t>
+                    </m:r>
+                    <m:r>
+                      <a:rPr lang="en-US" b="0" i="1" smtClean="0">
+                        <a:latin typeface="Cambria Math" panose="02040503050406030204" pitchFamily="18" charset="0"/>
+                      </a:rPr>
+                      <m:t>𝐺</m:t>
+                    </m:r>
+                  </m:oMath>
+                </a14:m>
+                <a:r>
+                  <a:rPr lang="en-US" dirty="0"/>
+                  <a:t>, with associative law </a:t>
+                </a:r>
+                <a14:m>
+                  <m:oMath xmlns:m="http://schemas.openxmlformats.org/officeDocument/2006/math">
+                    <m:d>
+                      <m:dPr>
+                        <m:ctrlPr>
+                          <a:rPr lang="en-US" b="0" i="1" smtClean="0">
+                            <a:latin typeface="Cambria Math" panose="02040503050406030204" pitchFamily="18" charset="0"/>
+                          </a:rPr>
+                        </m:ctrlPr>
+                      </m:dPr>
+                      <m:e>
+                        <m:r>
+                          <a:rPr lang="en-US" b="0" i="1" smtClean="0">
+                            <a:latin typeface="Cambria Math" panose="02040503050406030204" pitchFamily="18" charset="0"/>
+                          </a:rPr>
+                          <m:t>𝐴𝐵</m:t>
+                        </m:r>
+                      </m:e>
+                    </m:d>
+                    <m:r>
+                      <a:rPr lang="en-US" b="0" i="1" smtClean="0">
+                        <a:latin typeface="Cambria Math" panose="02040503050406030204" pitchFamily="18" charset="0"/>
+                      </a:rPr>
+                      <m:t>𝐶</m:t>
+                    </m:r>
+                    <m:r>
+                      <a:rPr lang="en-US" b="0" i="1" smtClean="0">
+                        <a:latin typeface="Cambria Math" panose="02040503050406030204" pitchFamily="18" charset="0"/>
+                      </a:rPr>
+                      <m:t>=</m:t>
+                    </m:r>
+                    <m:r>
+                      <a:rPr lang="en-US" b="0" i="1" smtClean="0">
+                        <a:latin typeface="Cambria Math" panose="02040503050406030204" pitchFamily="18" charset="0"/>
+                      </a:rPr>
+                      <m:t>𝐴</m:t>
+                    </m:r>
+                    <m:r>
+                      <a:rPr lang="en-US" b="0" i="1" smtClean="0">
+                        <a:latin typeface="Cambria Math" panose="02040503050406030204" pitchFamily="18" charset="0"/>
+                      </a:rPr>
+                      <m:t>(</m:t>
+                    </m:r>
+                    <m:r>
+                      <a:rPr lang="en-US" b="0" i="1" smtClean="0">
+                        <a:latin typeface="Cambria Math" panose="02040503050406030204" pitchFamily="18" charset="0"/>
+                      </a:rPr>
+                      <m:t>𝐵𝐶</m:t>
+                    </m:r>
+                    <m:r>
+                      <a:rPr lang="en-US" b="0" i="1" smtClean="0">
+                        <a:latin typeface="Cambria Math" panose="02040503050406030204" pitchFamily="18" charset="0"/>
+                      </a:rPr>
+                      <m:t>)</m:t>
+                    </m:r>
+                  </m:oMath>
+                </a14:m>
+                <a:r>
+                  <a:rPr lang="en-US" dirty="0"/>
+                  <a:t>, existence of identity, </a:t>
+                </a:r>
+                <a14:m>
+                  <m:oMath xmlns:m="http://schemas.openxmlformats.org/officeDocument/2006/math">
+                    <m:r>
+                      <a:rPr lang="en-US" b="0" i="1" smtClean="0">
+                        <a:latin typeface="Cambria Math" panose="02040503050406030204" pitchFamily="18" charset="0"/>
+                      </a:rPr>
+                      <m:t>𝐴𝐼</m:t>
+                    </m:r>
+                    <m:r>
+                      <a:rPr lang="en-US" b="0" i="1" smtClean="0">
+                        <a:latin typeface="Cambria Math" panose="02040503050406030204" pitchFamily="18" charset="0"/>
+                      </a:rPr>
+                      <m:t>=</m:t>
+                    </m:r>
+                    <m:r>
+                      <a:rPr lang="en-US" b="0" i="1" smtClean="0">
+                        <a:latin typeface="Cambria Math" panose="02040503050406030204" pitchFamily="18" charset="0"/>
+                      </a:rPr>
+                      <m:t>𝐼𝐴</m:t>
+                    </m:r>
+                    <m:r>
+                      <a:rPr lang="en-US" b="0" i="1" smtClean="0">
+                        <a:latin typeface="Cambria Math" panose="02040503050406030204" pitchFamily="18" charset="0"/>
+                      </a:rPr>
+                      <m:t>=</m:t>
+                    </m:r>
+                    <m:r>
+                      <a:rPr lang="en-US" b="0" i="1" smtClean="0">
+                        <a:latin typeface="Cambria Math" panose="02040503050406030204" pitchFamily="18" charset="0"/>
+                      </a:rPr>
+                      <m:t>𝐴</m:t>
+                    </m:r>
+                  </m:oMath>
+                </a14:m>
+                <a:r>
+                  <a:rPr lang="en-US" dirty="0"/>
+                  <a:t> and inverse </a:t>
+                </a:r>
+                <a14:m>
+                  <m:oMath xmlns:m="http://schemas.openxmlformats.org/officeDocument/2006/math">
+                    <m:sSup>
+                      <m:sSupPr>
+                        <m:ctrlPr>
+                          <a:rPr lang="en-US" b="0" i="1" smtClean="0">
+                            <a:latin typeface="Cambria Math" panose="02040503050406030204" pitchFamily="18" charset="0"/>
+                          </a:rPr>
+                        </m:ctrlPr>
+                      </m:sSupPr>
+                      <m:e>
+                        <m:r>
+                          <a:rPr lang="en-US" b="0" i="1" smtClean="0">
+                            <a:latin typeface="Cambria Math" panose="02040503050406030204" pitchFamily="18" charset="0"/>
+                          </a:rPr>
+                          <m:t>𝐴</m:t>
+                        </m:r>
+                      </m:e>
+                      <m:sup>
+                        <m:r>
+                          <a:rPr lang="en-US" b="0" i="1" smtClean="0">
+                            <a:latin typeface="Cambria Math" panose="02040503050406030204" pitchFamily="18" charset="0"/>
+                          </a:rPr>
+                          <m:t>−1</m:t>
+                        </m:r>
+                      </m:sup>
+                    </m:sSup>
+                  </m:oMath>
+                </a14:m>
+                <a:r>
+                  <a:rPr lang="en-US" dirty="0"/>
+                  <a:t>.</a:t>
+                </a:r>
+              </a:p>
+              <a:p>
+                <a:pPr lvl="1"/>
+                <a:r>
+                  <a:rPr lang="en-US" dirty="0"/>
+                  <a:t>To handle symmetry we consider 1) pre-processing, 2) regularized error function, 3) data augmentation, 4) network architecture, e.g. CNN.</a:t>
+                </a:r>
+              </a:p>
+              <a:p>
+                <a:pPr lvl="1"/>
+                <a:endParaRPr lang="en-US" dirty="0"/>
+              </a:p>
+              <a:p>
+                <a:pPr lvl="1"/>
+                <a:endParaRPr lang="en-SG" dirty="0"/>
+              </a:p>
+            </p:txBody>
+          </p:sp>
+        </mc:Choice>
+        <mc:Fallback xmlns="">
+          <p:sp>
+            <p:nvSpPr>
+              <p:cNvPr id="3" name="Content Placeholder 2">
+                <a:extLst>
+                  <a:ext uri="{FF2B5EF4-FFF2-40B4-BE49-F238E27FC236}">
+                    <a16:creationId xmlns:a16="http://schemas.microsoft.com/office/drawing/2014/main" id="{A35BD1A7-97DB-4793-15A1-B6EDA2CD59DA}"/>
+                  </a:ext>
+                </a:extLst>
+              </p:cNvPr>
+              <p:cNvSpPr>
+                <a:spLocks noGrp="1" noRot="1" noChangeAspect="1" noMove="1" noResize="1" noEditPoints="1" noAdjustHandles="1" noChangeArrowheads="1" noChangeShapeType="1" noTextEdit="1"/>
+              </p:cNvSpPr>
+              <p:nvPr>
+                <p:ph idx="1"/>
+              </p:nvPr>
+            </p:nvSpPr>
+            <p:spPr>
+              <a:blipFill>
+                <a:blip r:embed="rId3"/>
+                <a:stretch>
+                  <a:fillRect l="-1391" t="-2381" r="-2009"/>
+                </a:stretch>
+              </a:blipFill>
+            </p:spPr>
+            <p:txBody>
+              <a:bodyPr/>
+              <a:lstStyle/>
+              <a:p>
+                <a:r>
+                  <a:rPr lang="en-SG">
+                    <a:noFill/>
+                  </a:rPr>
+                  <a:t> </a:t>
+                </a:r>
+              </a:p>
+            </p:txBody>
+          </p:sp>
+        </mc:Fallback>
+      </mc:AlternateContent>
+    </p:spTree>
+    <p:extLst>
+      <p:ext uri="{BB962C8B-B14F-4D97-AF65-F5344CB8AC3E}">
+        <p14:creationId xmlns:p14="http://schemas.microsoft.com/office/powerpoint/2010/main" val="843409894"/>
+      </p:ext>
+    </p:extLst>
+  </p:cSld>
+  <p:clrMapOvr>
+    <a:masterClrMapping/>
+  </p:clrMapOvr>
+</p:sld>
+</file>
+
+<file path=ppt/slides/slide6.xml><?xml version="1.0" encoding="utf-8"?>
+<p:sld xmlns:a="http://schemas.openxmlformats.org/drawingml/2006/main" xmlns:r="http://schemas.openxmlformats.org/officeDocument/2006/relationships" xmlns:p="http://schemas.openxmlformats.org/presentationml/2006/main">
+  <p:cSld>
+    <p:spTree>
+      <p:nvGrpSpPr>
+        <p:cNvPr id="1" name=""/>
+        <p:cNvGrpSpPr/>
+        <p:nvPr/>
+      </p:nvGrpSpPr>
+      <p:grpSpPr>
+        <a:xfrm>
+          <a:off x="0" y="0"/>
+          <a:ext cx="0" cy="0"/>
+          <a:chOff x="0" y="0"/>
+          <a:chExt cx="0" cy="0"/>
+        </a:xfrm>
+      </p:grpSpPr>
+      <p:sp>
+        <p:nvSpPr>
+          <p:cNvPr id="2" name="Title 1">
+            <a:extLst>
+              <a:ext uri="{FF2B5EF4-FFF2-40B4-BE49-F238E27FC236}">
+                <a16:creationId xmlns:a16="http://schemas.microsoft.com/office/drawing/2014/main" id="{03D5DD22-DBCA-2AB5-7BAF-9BAA5D86555F}"/>
+              </a:ext>
+            </a:extLst>
+          </p:cNvPr>
+          <p:cNvSpPr>
+            <a:spLocks noGrp="1"/>
+          </p:cNvSpPr>
+          <p:nvPr>
+            <p:ph type="title"/>
+          </p:nvPr>
+        </p:nvSpPr>
+        <p:spPr/>
+        <p:txBody>
+          <a:bodyPr/>
+          <a:lstStyle/>
+          <a:p>
+            <a:r>
+              <a:rPr lang="en-US" dirty="0"/>
+              <a:t>Equivariance</a:t>
+            </a:r>
+            <a:endParaRPr lang="en-SG" dirty="0"/>
+          </a:p>
+        </p:txBody>
+      </p:sp>
+      <mc:AlternateContent xmlns:mc="http://schemas.openxmlformats.org/markup-compatibility/2006" xmlns:a14="http://schemas.microsoft.com/office/drawing/2010/main">
+        <mc:Choice Requires="a14">
+          <p:sp>
+            <p:nvSpPr>
+              <p:cNvPr id="3" name="Content Placeholder 2">
+                <a:extLst>
+                  <a:ext uri="{FF2B5EF4-FFF2-40B4-BE49-F238E27FC236}">
+                    <a16:creationId xmlns:a16="http://schemas.microsoft.com/office/drawing/2014/main" id="{DF32209E-2960-DC50-255C-75E385D22FBC}"/>
+                  </a:ext>
+                </a:extLst>
+              </p:cNvPr>
+              <p:cNvSpPr>
+                <a:spLocks noGrp="1"/>
+              </p:cNvSpPr>
+              <p:nvPr>
+                <p:ph idx="1"/>
+              </p:nvPr>
+            </p:nvSpPr>
+            <p:spPr/>
+            <p:txBody>
+              <a:bodyPr>
+                <a:normAutofit fontScale="85000" lnSpcReduction="20000"/>
+              </a:bodyPr>
+              <a:lstStyle/>
+              <a:p>
+                <a:r>
+                  <a:rPr lang="en-US" dirty="0"/>
+                  <a:t>Two kinds of transformations, say, translation </a:t>
+                </a:r>
+                <a14:m>
+                  <m:oMath xmlns:m="http://schemas.openxmlformats.org/officeDocument/2006/math">
+                    <m:r>
+                      <a:rPr lang="en-US" b="0" i="1" smtClean="0">
+                        <a:latin typeface="Cambria Math" panose="02040503050406030204" pitchFamily="18" charset="0"/>
+                      </a:rPr>
+                      <m:t>𝑇</m:t>
+                    </m:r>
+                  </m:oMath>
+                </a14:m>
+                <a:r>
+                  <a:rPr lang="en-SG" dirty="0"/>
+                  <a:t> and segmentation </a:t>
+                </a:r>
+                <a14:m>
+                  <m:oMath xmlns:m="http://schemas.openxmlformats.org/officeDocument/2006/math">
+                    <m:r>
+                      <a:rPr lang="en-US" b="0" i="1" smtClean="0">
+                        <a:latin typeface="Cambria Math" panose="02040503050406030204" pitchFamily="18" charset="0"/>
+                      </a:rPr>
+                      <m:t>𝑆</m:t>
+                    </m:r>
+                  </m:oMath>
+                </a14:m>
+                <a:r>
+                  <a:rPr lang="en-SG" dirty="0"/>
+                  <a:t>.  Equivariance means</a:t>
+                </a:r>
+              </a:p>
+              <a:p>
+                <a14:m>
+                  <m:oMath xmlns:m="http://schemas.openxmlformats.org/officeDocument/2006/math">
+                    <m:r>
+                      <a:rPr lang="en-US" b="0" i="1" smtClean="0">
+                        <a:latin typeface="Cambria Math" panose="02040503050406030204" pitchFamily="18" charset="0"/>
+                      </a:rPr>
+                      <m:t>𝑆</m:t>
+                    </m:r>
+                    <m:d>
+                      <m:dPr>
+                        <m:ctrlPr>
+                          <a:rPr lang="en-US" b="0" i="1" smtClean="0">
+                            <a:latin typeface="Cambria Math" panose="02040503050406030204" pitchFamily="18" charset="0"/>
+                          </a:rPr>
+                        </m:ctrlPr>
+                      </m:dPr>
+                      <m:e>
+                        <m:r>
+                          <a:rPr lang="en-US" b="0" i="1" smtClean="0">
+                            <a:latin typeface="Cambria Math" panose="02040503050406030204" pitchFamily="18" charset="0"/>
+                          </a:rPr>
+                          <m:t>𝑇</m:t>
+                        </m:r>
+                        <m:d>
+                          <m:dPr>
+                            <m:ctrlPr>
+                              <a:rPr lang="en-US" b="0" i="1" smtClean="0">
+                                <a:latin typeface="Cambria Math" panose="02040503050406030204" pitchFamily="18" charset="0"/>
+                              </a:rPr>
+                            </m:ctrlPr>
+                          </m:dPr>
+                          <m:e>
+                            <m:r>
+                              <a:rPr lang="en-US" b="0" i="1" smtClean="0">
+                                <a:latin typeface="Cambria Math" panose="02040503050406030204" pitchFamily="18" charset="0"/>
+                              </a:rPr>
+                              <m:t>𝐼</m:t>
+                            </m:r>
+                          </m:e>
+                        </m:d>
+                      </m:e>
+                    </m:d>
+                    <m:r>
+                      <a:rPr lang="en-US" b="0" i="1" smtClean="0">
+                        <a:latin typeface="Cambria Math" panose="02040503050406030204" pitchFamily="18" charset="0"/>
+                      </a:rPr>
+                      <m:t>=</m:t>
+                    </m:r>
+                    <m:r>
+                      <a:rPr lang="en-US" b="0" i="1" smtClean="0">
+                        <a:latin typeface="Cambria Math" panose="02040503050406030204" pitchFamily="18" charset="0"/>
+                      </a:rPr>
+                      <m:t>𝑇</m:t>
+                    </m:r>
+                    <m:d>
+                      <m:dPr>
+                        <m:ctrlPr>
+                          <a:rPr lang="en-US" b="0" i="1" smtClean="0">
+                            <a:latin typeface="Cambria Math" panose="02040503050406030204" pitchFamily="18" charset="0"/>
+                          </a:rPr>
+                        </m:ctrlPr>
+                      </m:dPr>
+                      <m:e>
+                        <m:r>
+                          <a:rPr lang="en-US" b="0" i="1" smtClean="0">
+                            <a:latin typeface="Cambria Math" panose="02040503050406030204" pitchFamily="18" charset="0"/>
+                          </a:rPr>
+                          <m:t>𝑆</m:t>
+                        </m:r>
+                        <m:d>
+                          <m:dPr>
+                            <m:ctrlPr>
+                              <a:rPr lang="en-US" b="0" i="1" smtClean="0">
+                                <a:latin typeface="Cambria Math" panose="02040503050406030204" pitchFamily="18" charset="0"/>
+                              </a:rPr>
+                            </m:ctrlPr>
+                          </m:dPr>
+                          <m:e>
+                            <m:r>
+                              <a:rPr lang="en-US" b="0" i="1" smtClean="0">
+                                <a:latin typeface="Cambria Math" panose="02040503050406030204" pitchFamily="18" charset="0"/>
+                              </a:rPr>
+                              <m:t>𝐼</m:t>
+                            </m:r>
+                          </m:e>
+                        </m:d>
+                      </m:e>
+                    </m:d>
+                  </m:oMath>
+                </a14:m>
+                <a:endParaRPr lang="en-SG" dirty="0"/>
+              </a:p>
+              <a:p>
+                <a14:m>
+                  <m:oMath xmlns:m="http://schemas.openxmlformats.org/officeDocument/2006/math">
+                    <m:r>
+                      <a:rPr lang="en-US" b="0" i="1" smtClean="0">
+                        <a:latin typeface="Cambria Math" panose="02040503050406030204" pitchFamily="18" charset="0"/>
+                      </a:rPr>
+                      <m:t>𝐼</m:t>
+                    </m:r>
+                  </m:oMath>
+                </a14:m>
+                <a:r>
+                  <a:rPr lang="en-SG" dirty="0"/>
+                  <a:t>: input image</a:t>
+                </a:r>
+              </a:p>
+              <a:p>
+                <a:endParaRPr lang="en-SG" dirty="0"/>
+              </a:p>
+              <a:p>
+                <a:r>
+                  <a:rPr lang="en-SG" dirty="0"/>
+                  <a:t>If an image (a) is first</a:t>
+                </a:r>
+              </a:p>
+              <a:p>
+                <a:pPr marL="0" indent="0">
+                  <a:buNone/>
+                </a:pPr>
+                <a:r>
+                  <a:rPr lang="en-SG" dirty="0"/>
+                  <a:t>translated to give (b)</a:t>
+                </a:r>
+              </a:p>
+              <a:p>
+                <a:pPr marL="0" indent="0">
+                  <a:buNone/>
+                </a:pPr>
+                <a:r>
+                  <a:rPr lang="en-SG" dirty="0"/>
+                  <a:t>and then segmented to</a:t>
+                </a:r>
+              </a:p>
+              <a:p>
+                <a:pPr marL="0" indent="0">
+                  <a:buNone/>
+                </a:pPr>
+                <a:r>
+                  <a:rPr lang="en-SG" dirty="0"/>
+                  <a:t>give (d), the result is</a:t>
+                </a:r>
+              </a:p>
+              <a:p>
+                <a:pPr marL="0" indent="0">
+                  <a:buNone/>
+                </a:pPr>
+                <a:r>
+                  <a:rPr lang="en-SG" dirty="0"/>
+                  <a:t>the same if the order is</a:t>
+                </a:r>
+              </a:p>
+              <a:p>
+                <a:pPr marL="0" indent="0">
+                  <a:buNone/>
+                </a:pPr>
+                <a:r>
+                  <a:rPr lang="en-SG" dirty="0"/>
+                  <a:t>reversed.</a:t>
+                </a:r>
+              </a:p>
+              <a:p>
+                <a:pPr marL="0" indent="0">
+                  <a:buNone/>
+                </a:pPr>
+                <a:endParaRPr lang="en-SG" dirty="0"/>
+              </a:p>
+            </p:txBody>
+          </p:sp>
+        </mc:Choice>
+        <mc:Fallback xmlns="">
+          <p:sp>
+            <p:nvSpPr>
+              <p:cNvPr id="3" name="Content Placeholder 2">
+                <a:extLst>
+                  <a:ext uri="{FF2B5EF4-FFF2-40B4-BE49-F238E27FC236}">
+                    <a16:creationId xmlns:a16="http://schemas.microsoft.com/office/drawing/2014/main" id="{DF32209E-2960-DC50-255C-75E385D22FBC}"/>
+                  </a:ext>
+                </a:extLst>
+              </p:cNvPr>
+              <p:cNvSpPr>
+                <a:spLocks noGrp="1" noRot="1" noChangeAspect="1" noMove="1" noResize="1" noEditPoints="1" noAdjustHandles="1" noChangeArrowheads="1" noChangeShapeType="1" noTextEdit="1"/>
+              </p:cNvSpPr>
+              <p:nvPr>
+                <p:ph idx="1"/>
+              </p:nvPr>
+            </p:nvSpPr>
+            <p:spPr>
+              <a:blipFill>
+                <a:blip r:embed="rId2"/>
+                <a:stretch>
+                  <a:fillRect l="-1159" t="-3641"/>
+                </a:stretch>
+              </a:blipFill>
+            </p:spPr>
+            <p:txBody>
+              <a:bodyPr/>
+              <a:lstStyle/>
+              <a:p>
+                <a:r>
+                  <a:rPr lang="en-SG">
+                    <a:noFill/>
+                  </a:rPr>
+                  <a:t> </a:t>
+                </a:r>
+              </a:p>
+            </p:txBody>
+          </p:sp>
+        </mc:Fallback>
+      </mc:AlternateContent>
+      <p:pic>
+        <p:nvPicPr>
+          <p:cNvPr id="5" name="Picture 4">
+            <a:extLst>
+              <a:ext uri="{FF2B5EF4-FFF2-40B4-BE49-F238E27FC236}">
+                <a16:creationId xmlns:a16="http://schemas.microsoft.com/office/drawing/2014/main" id="{5EC3AF8E-6A62-E6D3-4AF2-696D14CAAE37}"/>
+              </a:ext>
+            </a:extLst>
+          </p:cNvPr>
+          <p:cNvPicPr>
+            <a:picLocks noChangeAspect="1"/>
+          </p:cNvPicPr>
+          <p:nvPr/>
+        </p:nvPicPr>
+        <p:blipFill>
+          <a:blip r:embed="rId3"/>
+          <a:stretch>
+            <a:fillRect/>
+          </a:stretch>
+        </p:blipFill>
+        <p:spPr>
+          <a:xfrm>
+            <a:off x="5221846" y="2835274"/>
+            <a:ext cx="3404729" cy="3657600"/>
+          </a:xfrm>
+          <a:prstGeom prst="rect">
+            <a:avLst/>
+          </a:prstGeom>
+        </p:spPr>
+      </p:pic>
+    </p:spTree>
+    <p:extLst>
+      <p:ext uri="{BB962C8B-B14F-4D97-AF65-F5344CB8AC3E}">
+        <p14:creationId xmlns:p14="http://schemas.microsoft.com/office/powerpoint/2010/main" val="590719091"/>
+      </p:ext>
+    </p:extLst>
+  </p:cSld>
+  <p:clrMapOvr>
+    <a:masterClrMapping/>
+  </p:clrMapOvr>
+</p:sld>
+</file>
+
+<file path=ppt/slides/slide7.xml><?xml version="1.0" encoding="utf-8"?>
+<p:sld xmlns:a="http://schemas.openxmlformats.org/drawingml/2006/main" xmlns:r="http://schemas.openxmlformats.org/officeDocument/2006/relationships" xmlns:p="http://schemas.openxmlformats.org/presentationml/2006/main">
+  <p:cSld>
+    <p:spTree>
+      <p:nvGrpSpPr>
+        <p:cNvPr id="1" name=""/>
+        <p:cNvGrpSpPr/>
+        <p:nvPr/>
+      </p:nvGrpSpPr>
+      <p:grpSpPr>
+        <a:xfrm>
+          <a:off x="0" y="0"/>
+          <a:ext cx="0" cy="0"/>
+          <a:chOff x="0" y="0"/>
+          <a:chExt cx="0" cy="0"/>
+        </a:xfrm>
+      </p:grpSpPr>
+      <p:sp>
+        <p:nvSpPr>
+          <p:cNvPr id="2" name="Title 1">
+            <a:extLst>
+              <a:ext uri="{FF2B5EF4-FFF2-40B4-BE49-F238E27FC236}">
+                <a16:creationId xmlns:a16="http://schemas.microsoft.com/office/drawing/2014/main" id="{D0215E0B-5C0E-29FC-3D1A-245E5D71804D}"/>
+              </a:ext>
+            </a:extLst>
+          </p:cNvPr>
+          <p:cNvSpPr>
+            <a:spLocks noGrp="1"/>
+          </p:cNvSpPr>
+          <p:nvPr>
+            <p:ph type="title"/>
+          </p:nvPr>
+        </p:nvSpPr>
+        <p:spPr/>
+        <p:txBody>
+          <a:bodyPr/>
+          <a:lstStyle/>
+          <a:p>
+            <a:r>
+              <a:rPr lang="en-US" dirty="0"/>
+              <a:t>Regularization</a:t>
+            </a:r>
+            <a:endParaRPr lang="en-SG" dirty="0"/>
+          </a:p>
+        </p:txBody>
+      </p:sp>
+      <mc:AlternateContent xmlns:mc="http://schemas.openxmlformats.org/markup-compatibility/2006" xmlns:a14="http://schemas.microsoft.com/office/drawing/2010/main">
+        <mc:Choice Requires="a14">
+          <p:sp>
+            <p:nvSpPr>
+              <p:cNvPr id="3" name="Content Placeholder 2">
+                <a:extLst>
+                  <a:ext uri="{FF2B5EF4-FFF2-40B4-BE49-F238E27FC236}">
+                    <a16:creationId xmlns:a16="http://schemas.microsoft.com/office/drawing/2014/main" id="{475794ED-3E24-36F7-0208-95B5F1C4FB77}"/>
+                  </a:ext>
+                </a:extLst>
+              </p:cNvPr>
+              <p:cNvSpPr>
+                <a:spLocks noGrp="1"/>
+              </p:cNvSpPr>
+              <p:nvPr>
+                <p:ph idx="1"/>
+              </p:nvPr>
+            </p:nvSpPr>
+            <p:spPr/>
+            <p:txBody>
+              <a:bodyPr/>
+              <a:lstStyle/>
+              <a:p>
+                <a:r>
+                  <a:rPr lang="en-US" dirty="0"/>
+                  <a:t>Methods for reducing overfitting, thus better generalization </a:t>
+                </a:r>
+              </a:p>
+              <a:p>
+                <a:endParaRPr lang="en-US" dirty="0"/>
+              </a:p>
+              <a:p>
+                <a:r>
+                  <a:rPr lang="en-US" dirty="0"/>
+                  <a:t>Make an ill-posed problem well-behaved (e.g. more fitting parameters than data)</a:t>
+                </a:r>
+              </a:p>
+              <a:p>
+                <a:endParaRPr lang="en-US" dirty="0"/>
+              </a:p>
+              <a:p>
+                <a:r>
+                  <a:rPr lang="en-US" dirty="0"/>
+                  <a:t>The most basic method: weight decay</a:t>
+                </a:r>
+              </a:p>
+              <a:p>
+                <a:pPr marL="0" indent="0">
+                  <a:buNone/>
+                </a:pPr>
+                <a14:m>
+                  <m:oMathPara xmlns:m="http://schemas.openxmlformats.org/officeDocument/2006/math">
+                    <m:oMathParaPr>
+                      <m:jc m:val="centerGroup"/>
+                    </m:oMathParaPr>
+                    <m:oMath xmlns:m="http://schemas.openxmlformats.org/officeDocument/2006/math">
+                      <m:r>
+                        <a:rPr lang="en-US" b="0" i="1" smtClean="0">
+                          <a:latin typeface="Cambria Math" panose="02040503050406030204" pitchFamily="18" charset="0"/>
+                        </a:rPr>
+                        <m:t> </m:t>
+                      </m:r>
+                      <m:acc>
+                        <m:accPr>
+                          <m:chr m:val="̃"/>
+                          <m:ctrlPr>
+                            <a:rPr lang="en-US" b="0" i="1" smtClean="0">
+                              <a:latin typeface="Cambria Math" panose="02040503050406030204" pitchFamily="18" charset="0"/>
+                            </a:rPr>
+                          </m:ctrlPr>
+                        </m:accPr>
+                        <m:e>
+                          <m:r>
+                            <a:rPr lang="en-US" b="0" i="1" smtClean="0">
+                              <a:latin typeface="Cambria Math" panose="02040503050406030204" pitchFamily="18" charset="0"/>
+                            </a:rPr>
+                            <m:t>𝐸</m:t>
+                          </m:r>
+                        </m:e>
+                      </m:acc>
+                      <m:d>
+                        <m:dPr>
+                          <m:ctrlPr>
+                            <a:rPr lang="en-US" b="0" i="1" smtClean="0">
+                              <a:latin typeface="Cambria Math" panose="02040503050406030204" pitchFamily="18" charset="0"/>
+                            </a:rPr>
+                          </m:ctrlPr>
+                        </m:dPr>
+                        <m:e>
+                          <m:r>
+                            <a:rPr lang="en-US" b="1" i="1" smtClean="0">
+                              <a:latin typeface="Cambria Math" panose="02040503050406030204" pitchFamily="18" charset="0"/>
+                            </a:rPr>
+                            <m:t>𝒘</m:t>
+                          </m:r>
+                        </m:e>
+                      </m:d>
+                      <m:r>
+                        <a:rPr lang="en-US" b="0" i="1" smtClean="0">
+                          <a:latin typeface="Cambria Math" panose="02040503050406030204" pitchFamily="18" charset="0"/>
+                        </a:rPr>
+                        <m:t>=</m:t>
+                      </m:r>
+                      <m:r>
+                        <a:rPr lang="en-US" b="0" i="1" smtClean="0">
+                          <a:latin typeface="Cambria Math" panose="02040503050406030204" pitchFamily="18" charset="0"/>
+                        </a:rPr>
+                        <m:t>𝐸</m:t>
+                      </m:r>
+                      <m:d>
+                        <m:dPr>
+                          <m:ctrlPr>
+                            <a:rPr lang="en-US" b="0" i="1" smtClean="0">
+                              <a:latin typeface="Cambria Math" panose="02040503050406030204" pitchFamily="18" charset="0"/>
+                            </a:rPr>
+                          </m:ctrlPr>
+                        </m:dPr>
+                        <m:e>
+                          <m:r>
+                            <a:rPr lang="en-US" b="1" i="1" smtClean="0">
+                              <a:latin typeface="Cambria Math" panose="02040503050406030204" pitchFamily="18" charset="0"/>
+                            </a:rPr>
+                            <m:t>𝒘</m:t>
+                          </m:r>
+                        </m:e>
+                      </m:d>
+                      <m:r>
+                        <a:rPr lang="en-US" b="0" i="1" smtClean="0">
+                          <a:latin typeface="Cambria Math" panose="02040503050406030204" pitchFamily="18" charset="0"/>
+                        </a:rPr>
+                        <m:t>+</m:t>
+                      </m:r>
+                      <m:f>
+                        <m:fPr>
+                          <m:ctrlPr>
+                            <a:rPr lang="en-US" b="0" i="1" smtClean="0">
+                              <a:latin typeface="Cambria Math" panose="02040503050406030204" pitchFamily="18" charset="0"/>
+                            </a:rPr>
+                          </m:ctrlPr>
+                        </m:fPr>
+                        <m:num>
+                          <m:r>
+                            <a:rPr lang="en-US" b="0" i="1" smtClean="0">
+                              <a:latin typeface="Cambria Math" panose="02040503050406030204" pitchFamily="18" charset="0"/>
+                            </a:rPr>
+                            <m:t>𝜆</m:t>
+                          </m:r>
+                        </m:num>
+                        <m:den>
+                          <m:r>
+                            <a:rPr lang="en-US" b="0" i="1" smtClean="0">
+                              <a:latin typeface="Cambria Math" panose="02040503050406030204" pitchFamily="18" charset="0"/>
+                            </a:rPr>
+                            <m:t>2</m:t>
+                          </m:r>
+                        </m:den>
+                      </m:f>
+                      <m:r>
+                        <a:rPr lang="en-US" b="0" i="1" smtClean="0">
+                          <a:latin typeface="Cambria Math" panose="02040503050406030204" pitchFamily="18" charset="0"/>
+                        </a:rPr>
+                        <m:t> </m:t>
+                      </m:r>
+                      <m:sSup>
+                        <m:sSupPr>
+                          <m:ctrlPr>
+                            <a:rPr lang="en-US" b="0" i="1" smtClean="0">
+                              <a:latin typeface="Cambria Math" panose="02040503050406030204" pitchFamily="18" charset="0"/>
+                            </a:rPr>
+                          </m:ctrlPr>
+                        </m:sSupPr>
+                        <m:e>
+                          <m:r>
+                            <a:rPr lang="en-US" b="1" i="1" smtClean="0">
+                              <a:latin typeface="Cambria Math" panose="02040503050406030204" pitchFamily="18" charset="0"/>
+                            </a:rPr>
+                            <m:t>𝒘</m:t>
+                          </m:r>
+                        </m:e>
+                        <m:sup>
+                          <m:r>
+                            <a:rPr lang="en-US" b="0" i="1" smtClean="0">
+                              <a:latin typeface="Cambria Math" panose="02040503050406030204" pitchFamily="18" charset="0"/>
+                            </a:rPr>
+                            <m:t>𝑇</m:t>
+                          </m:r>
+                        </m:sup>
+                      </m:sSup>
+                      <m:r>
+                        <a:rPr lang="en-US" b="1" i="1" smtClean="0">
+                          <a:latin typeface="Cambria Math" panose="02040503050406030204" pitchFamily="18" charset="0"/>
+                        </a:rPr>
+                        <m:t>𝒘</m:t>
+                      </m:r>
+                    </m:oMath>
+                  </m:oMathPara>
+                </a14:m>
+                <a:endParaRPr lang="en-US" b="1" dirty="0"/>
+              </a:p>
+            </p:txBody>
+          </p:sp>
+        </mc:Choice>
+        <mc:Fallback xmlns="">
+          <p:sp>
+            <p:nvSpPr>
+              <p:cNvPr id="3" name="Content Placeholder 2">
+                <a:extLst>
+                  <a:ext uri="{FF2B5EF4-FFF2-40B4-BE49-F238E27FC236}">
+                    <a16:creationId xmlns:a16="http://schemas.microsoft.com/office/drawing/2014/main" id="{475794ED-3E24-36F7-0208-95B5F1C4FB77}"/>
+                  </a:ext>
+                </a:extLst>
+              </p:cNvPr>
+              <p:cNvSpPr>
+                <a:spLocks noGrp="1" noRot="1" noChangeAspect="1" noMove="1" noResize="1" noEditPoints="1" noAdjustHandles="1" noChangeArrowheads="1" noChangeShapeType="1" noTextEdit="1"/>
+              </p:cNvSpPr>
+              <p:nvPr>
+                <p:ph idx="1"/>
+              </p:nvPr>
+            </p:nvSpPr>
+            <p:spPr>
+              <a:blipFill>
+                <a:blip r:embed="rId3"/>
+                <a:stretch>
+                  <a:fillRect l="-1391" t="-2381"/>
+                </a:stretch>
+              </a:blipFill>
+            </p:spPr>
+            <p:txBody>
+              <a:bodyPr/>
+              <a:lstStyle/>
+              <a:p>
+                <a:r>
+                  <a:rPr lang="en-SG">
+                    <a:noFill/>
+                  </a:rPr>
+                  <a:t> </a:t>
+                </a:r>
+              </a:p>
+            </p:txBody>
+          </p:sp>
+        </mc:Fallback>
+      </mc:AlternateContent>
+    </p:spTree>
+    <p:extLst>
+      <p:ext uri="{BB962C8B-B14F-4D97-AF65-F5344CB8AC3E}">
+        <p14:creationId xmlns:p14="http://schemas.microsoft.com/office/powerpoint/2010/main" val="1530894939"/>
       </p:ext>
     </p:extLst>
   </p:cSld>
@@ -14111,7 +14327,7 @@
               <a:p>
                 <a:r>
                   <a:rPr lang="en-US" dirty="0"/>
-                  <a:t>Before seeing the data, we assume the weights have a gaussian distribution (prior) </a:t>
+                  <a:t>Before seeing the data, we assume the weights have a Gaussian distribution (prior) </a:t>
                 </a:r>
                 <a14:m>
                   <m:oMath xmlns:m="http://schemas.openxmlformats.org/officeDocument/2006/math">
@@ -14734,7 +14950,9 @@
             </p:nvSpPr>
             <p:spPr/>
             <p:txBody>
-              <a:bodyPr/>
+              <a:bodyPr>
+                <a:normAutofit/>
+              </a:bodyPr>
               <a:lstStyle/>
               <a:p>
                 <a:r>
@@ -14743,37 +14961,42 @@
                 </a:r>
                 <a14:m>
                   <m:oMath xmlns:m="http://schemas.openxmlformats.org/officeDocument/2006/math">
-                    <m:sSup>
-                      <m:sSupPr>
+                    <m:sSub>
+                      <m:sSubPr>
                         <m:ctrlPr>
                           <a:rPr lang="en-US" b="0" i="1" smtClean="0">
                             <a:latin typeface="Cambria Math" panose="02040503050406030204" pitchFamily="18" charset="0"/>
                           </a:rPr>
                         </m:ctrlPr>
-                      </m:sSupPr>
+                      </m:sSubPr>
                       <m:e>
                         <m:r>
                           <a:rPr lang="en-US" b="0" i="1" smtClean="0">
                             <a:latin typeface="Cambria Math" panose="02040503050406030204" pitchFamily="18" charset="0"/>
                           </a:rPr>
-                          <m:t>𝑤</m:t>
+                          <m:t>𝐿</m:t>
                         </m:r>
                       </m:e>
-                      <m:sup>
+                      <m:sub>
                         <m:r>
                           <a:rPr lang="en-US" b="0" i="1" smtClean="0">
                             <a:latin typeface="Cambria Math" panose="02040503050406030204" pitchFamily="18" charset="0"/>
                           </a:rPr>
                           <m:t>2</m:t>
                         </m:r>
-                      </m:sup>
-                    </m:sSup>
+                      </m:sub>
+                    </m:sSub>
                   </m:oMath>
                 </a14:m>
                 <a:r>
                   <a:rPr lang="en-SG" dirty="0"/>
-                  <a:t> regularizer</a:t>
+                  <a:t> </a:t>
                 </a:r>
+                <a:r>
+                  <a:rPr lang="en-SG" dirty="0" err="1"/>
+                  <a:t>regularizer</a:t>
+                </a:r>
+                <a:endParaRPr lang="en-SG" dirty="0"/>
               </a:p>
             </p:txBody>
           </p:sp>
@@ -14799,7 +15022,7 @@
               <a:blipFill>
                 <a:blip r:embed="rId2"/>
                 <a:stretch>
-                  <a:fillRect l="-3091" r="-2241"/>
+                  <a:fillRect l="-3091" r="-309"/>
                 </a:stretch>
               </a:blipFill>
             </p:spPr>
